--- a/slides/datasets-in-10-minutes-chef.pptx
+++ b/slides/datasets-in-10-minutes-chef.pptx
@@ -55,9 +55,6 @@
     <p:sldId id="303" r:id="rId53"/>
     <p:sldId id="304" r:id="rId54"/>
     <p:sldId id="305" r:id="rId55"/>
-    <p:sldId id="306" r:id="rId56"/>
-    <p:sldId id="307" r:id="rId57"/>
-    <p:sldId id="308" r:id="rId58"/>
     <p:sldId id="309" r:id="rId59"/>
     <p:sldId id="310" r:id="rId60"/>
     <p:sldId id="311" r:id="rId61"/>
@@ -65,7 +62,6 @@
     <p:sldId id="313" r:id="rId63"/>
     <p:sldId id="314" r:id="rId64"/>
     <p:sldId id="315" r:id="rId65"/>
-    <p:sldId id="316" r:id="rId66"/>
     <p:sldId id="317" r:id="rId67"/>
     <p:sldId id="318" r:id="rId68"/>
     <p:sldId id="319" r:id="rId69"/>
@@ -7740,7 +7736,7 @@
                 <a:ea typeface="Noto Sans CJK JP"/>
                 <a:cs typeface="Noto Sans"/>
               </a:rPr>
-              <a:t>日本語訳：主張と注釈根拠の全文</a:t>
+              <a:t>日本語訳：主張と根拠の全文</a:t>
             </a:r>
           </a:p>
         </p:txBody>
@@ -7845,7 +7841,7 @@
                 <a:ea typeface="Noto Sans CJK JP"/>
                 <a:cs typeface="Noto Sans"/>
               </a:rPr>
-              <a:t>注釈根拠：</a:t>
+              <a:t>根拠：</a:t>
             </a:r>
           </a:p>
           <a:p>
@@ -7961,7 +7957,7 @@
                 <a:ea typeface="Noto Sans CJK JP"/>
                 <a:cs typeface="Noto Sans"/>
               </a:rPr>
-              <a:t>配布ラベル：反証 / REF</a:t>
+              <a:t>正解：反証</a:t>
             </a:r>
           </a:p>
         </p:txBody>
@@ -7996,7 +7992,7 @@
                 <a:spcPts val="0"/>
               </a:spcBef>
               <a:spcAft>
-                <a:spcPts val="140"/>
+                <a:spcPts val="400"/>
               </a:spcAft>
               <a:buNone/>
               <a:defRPr sz="810" b="0">
@@ -8015,25 +8011,19 @@
                 <a:ea typeface="Noto Sans CJK JP"/>
                 <a:cs typeface="Noto Sans"/>
               </a:rPr>
-              <a:t>[1] THU-BPM. CHEF公式CHEF.tar.gz、train/dev/test原JSON。 train row3728 / claimId1281 / 根拠2文</a:t>
-            </a:r>
-          </a:p>
-          <a:p>
-            <a:pPr>
-              <a:lnSpc>
-                <a:spcPts val="940"/>
-              </a:lnSpc>
-              <a:spcAft>
-                <a:spcPts val="400"/>
-              </a:spcAft>
-              <a:buNone/>
-              <a:defRPr sz="810" b="0">
-                <a:solidFill>
-                  <a:srgbClr val="303437"/>
-                </a:solidFill>
-                <a:latin typeface="Noto Sans"/>
-              </a:defRPr>
-            </a:pPr>
+              <a:t>[1] THU-BPM. CHEF データセット。</a:t>
+            </a:r>
+            <a:r>
+              <a:rPr sz="810" b="0" lang="ja-JP" altLang="en-US">
+                <a:solidFill>
+                  <a:srgbClr val="626669"/>
+                </a:solidFill>
+                <a:latin typeface="Noto Sans"/>
+                <a:ea typeface="Noto Sans CJK JP"/>
+                <a:cs typeface="Noto Sans"/>
+              </a:rPr>
+              <a:t>  </a:t>
+            </a:r>
             <a:r>
               <a:rPr sz="810" b="0" lang="ja-JP" altLang="en-US">
                 <a:solidFill>
@@ -8265,7 +8255,7 @@
                 <a:ea typeface="Noto Sans CJK JP"/>
                 <a:cs typeface="Noto Sans"/>
               </a:rPr>
-              <a:t>[1] THU-BPM. CHEF公式CHEF.tar.gz、train/dev/test原JSON。</a:t>
+              <a:t>[1] THU-BPM. CHEF データセット。</a:t>
             </a:r>
             <a:r>
               <a:rPr sz="810" b="0" lang="ja-JP" altLang="en-US">
@@ -8456,7 +8446,7 @@
                 <a:ea typeface="Noto Sans CJK JP"/>
                 <a:cs typeface="Noto Sans"/>
               </a:rPr>
-              <a:t>中国語：主張と注釈根拠の全文 ／ 日本語訳</a:t>
+              <a:t>中国語：主張と根拠の全文 ／ 日本語訳</a:t>
             </a:r>
           </a:p>
         </p:txBody>
@@ -8728,7 +8718,7 @@
                 <a:ea typeface="Noto Sans CJK JP"/>
                 <a:cs typeface="Noto Sans"/>
               </a:rPr>
-              <a:t>注釈根拠：</a:t>
+              <a:t>根拠：</a:t>
             </a:r>
           </a:p>
           <a:p>
@@ -8844,7 +8834,7 @@
                 <a:ea typeface="Noto Sans CJK JP"/>
                 <a:cs typeface="Noto Sans"/>
               </a:rPr>
-              <a:t>配布ラベル：情報不足 / NEI</a:t>
+              <a:t>正解：情報不足</a:t>
             </a:r>
           </a:p>
         </p:txBody>
@@ -8879,7 +8869,7 @@
                 <a:spcPts val="0"/>
               </a:spcBef>
               <a:spcAft>
-                <a:spcPts val="140"/>
+                <a:spcPts val="400"/>
               </a:spcAft>
               <a:buNone/>
               <a:defRPr sz="810" b="0">
@@ -8898,25 +8888,19 @@
                 <a:ea typeface="Noto Sans CJK JP"/>
                 <a:cs typeface="Noto Sans"/>
               </a:rPr>
-              <a:t>[1] THU-BPM. CHEF公式CHEF.tar.gz、train/dev/test原JSON。 test row701 / claimId3345 / 根拠2文</a:t>
-            </a:r>
-          </a:p>
-          <a:p>
-            <a:pPr>
-              <a:lnSpc>
-                <a:spcPts val="940"/>
-              </a:lnSpc>
-              <a:spcAft>
-                <a:spcPts val="400"/>
-              </a:spcAft>
-              <a:buNone/>
-              <a:defRPr sz="810" b="0">
-                <a:solidFill>
-                  <a:srgbClr val="303437"/>
-                </a:solidFill>
-                <a:latin typeface="Noto Sans"/>
-              </a:defRPr>
-            </a:pPr>
+              <a:t>[1] THU-BPM. CHEF データセット。</a:t>
+            </a:r>
+            <a:r>
+              <a:rPr sz="810" b="0" lang="ja-JP" altLang="en-US">
+                <a:solidFill>
+                  <a:srgbClr val="626669"/>
+                </a:solidFill>
+                <a:latin typeface="Noto Sans"/>
+                <a:ea typeface="Noto Sans CJK JP"/>
+                <a:cs typeface="Noto Sans"/>
+              </a:rPr>
+              <a:t>  </a:t>
+            </a:r>
             <a:r>
               <a:rPr sz="810" b="0" lang="ja-JP" altLang="en-US">
                 <a:solidFill>
@@ -9046,7 +9030,7 @@
                 <a:ea typeface="Noto Sans CJK JP"/>
                 <a:cs typeface="Noto Sans"/>
               </a:rPr>
-              <a:t>配布ラベルは情報不足。根拠は写真と主食には触れるが、体重5gや「それだけを食べる」という範囲を全て確定してはいない。元の画像は本文の引用範囲に含まれない。</a:t>
+              <a:t>正解は情報不足。根拠は写真と主食には触れるが、体重5gや「それだけを食べる」という主張の全てを確定する情報はない。</a:t>
             </a:r>
           </a:p>
         </p:txBody>
@@ -9148,7 +9132,7 @@
                 <a:ea typeface="Noto Sans CJK JP"/>
                 <a:cs typeface="Noto Sans"/>
               </a:rPr>
-              <a:t>[1] THU-BPM. CHEF公式CHEF.tar.gz、train/dev/test原JSON。</a:t>
+              <a:t>[1] THU-BPM. CHEF データセット。</a:t>
             </a:r>
             <a:r>
               <a:rPr sz="810" b="0" lang="ja-JP" altLang="en-US">
@@ -9536,7 +9520,7 @@
                 <a:ea typeface="Noto Sans CJK JP"/>
                 <a:cs typeface="Noto Sans"/>
               </a:rPr>
-              <a:t>[1] Hu, Guo, Wu, Liu, Wen and Yu (2022). CHEF. NAACL-HLT, pp3362–3376.</a:t>
+              <a:t>[1] Hu et al. (2022). CHEF. NAACL-HLT.</a:t>
             </a:r>
             <a:r>
               <a:rPr sz="810" b="0" lang="ja-JP" altLang="en-US">
@@ -9625,7 +9609,7 @@
                 <a:ea typeface="Noto Sans CJK JP"/>
                 <a:cs typeface="Noto Sans"/>
               </a:rPr>
-              <a:t>収集・主張化・検索・注釈をつなぐ</a:t>
+              <a:t>検索結果から、最大5文の根拠を選ぶ</a:t>
             </a:r>
           </a:p>
         </p:txBody>
@@ -9680,14 +9664,14 @@
       </p:sp>
       <p:sp>
         <p:nvSpPr>
-          <p:cNvPr id="4" name="TextBox 3"/>
+          <p:cNvPr id="11" name="TextBox 10"/>
           <p:cNvSpPr txBox="1"/>
           <p:nvPr/>
         </p:nvSpPr>
         <p:spPr>
           <a:xfrm>
-            <a:off x="548640" y="1783080"/>
-            <a:ext cx="2286000" cy="1280160"/>
+            <a:off x="548640" y="1508760"/>
+            <a:ext cx="8046720" cy="2743200"/>
           </a:xfrm>
           <a:prstGeom prst="rect">
             <a:avLst/>
@@ -9719,15 +9703,15 @@
               </a:defRPr>
             </a:pPr>
             <a:r>
-              <a:rPr sz="2100" b="1" lang="ja-JP" altLang="en-US">
-                <a:solidFill>
-                  <a:srgbClr val="303437"/>
-                </a:solidFill>
-                <a:latin typeface="Noto Sans"/>
-                <a:ea typeface="Noto Sans CJK JP"/>
-                <a:cs typeface="Noto Sans"/>
-              </a:rPr>
-              <a:t>記事を収集</a:t>
+              <a:rPr sz="2100" b="0" lang="ja-JP" altLang="en-US">
+                <a:solidFill>
+                  <a:srgbClr val="303437"/>
+                </a:solidFill>
+                <a:latin typeface="Noto Sans"/>
+                <a:ea typeface="Noto Sans CJK JP"/>
+                <a:cs typeface="Noto Sans"/>
+              </a:rPr>
+              <a:t>検証記事や報道から主張を抽出し、時点や場所を補い、断定文の形に整える。</a:t>
             </a:r>
           </a:p>
           <a:p>
@@ -9750,354 +9734,53 @@
               </a:defRPr>
             </a:pPr>
             <a:r>
-              <a:rPr sz="2100" b="1" lang="ja-JP" altLang="en-US">
-                <a:solidFill>
-                  <a:srgbClr val="303437"/>
-                </a:solidFill>
-                <a:latin typeface="Noto Sans"/>
-                <a:ea typeface="Noto Sans CJK JP"/>
-                <a:cs typeface="Noto Sans"/>
-              </a:rPr>
-              <a:t>検証記事・報道</a:t>
+              <a:rPr sz="2100" b="0" lang="ja-JP" altLang="en-US">
+                <a:solidFill>
+                  <a:srgbClr val="303437"/>
+                </a:solidFill>
+                <a:latin typeface="Noto Sans"/>
+                <a:ea typeface="Noto Sans CJK JP"/>
+                <a:cs typeface="Noto Sans"/>
+              </a:rPr>
+              <a:t>Google検索の上位10結果を収集し、誤情報サイトや答えを直接示す事実検証サイトを除く。残った文書から人が最大5文の根拠を選ぶ。</a:t>
+            </a:r>
+          </a:p>
+          <a:p>
+            <a:pPr algn="l">
+              <a:lnSpc>
+                <a:spcPts val="2457"/>
+              </a:lnSpc>
+              <a:spcBef>
+                <a:spcPts val="0"/>
+              </a:spcBef>
+              <a:spcAft>
+                <a:spcPts val="0"/>
+              </a:spcAft>
+              <a:buNone/>
+              <a:defRPr sz="2100" b="0">
+                <a:solidFill>
+                  <a:srgbClr val="303437"/>
+                </a:solidFill>
+                <a:latin typeface="Noto Sans"/>
+              </a:defRPr>
+            </a:pPr>
+            <a:r>
+              <a:rPr sz="2100" b="0" lang="ja-JP" altLang="en-US">
+                <a:solidFill>
+                  <a:srgbClr val="303437"/>
+                </a:solidFill>
+                <a:latin typeface="Noto Sans"/>
+                <a:ea typeface="Noto Sans CJK JP"/>
+                <a:cs typeface="Noto Sans"/>
+              </a:rPr>
+              <a:t>関連する根拠が見つからなかった主張候補5.6％は、作成時に除外された。</a:t>
             </a:r>
           </a:p>
         </p:txBody>
       </p:sp>
       <p:sp>
         <p:nvSpPr>
-          <p:cNvPr id="5" name="TextBox 4"/>
-          <p:cNvSpPr txBox="1"/>
-          <p:nvPr/>
-        </p:nvSpPr>
-        <p:spPr>
-          <a:xfrm>
-            <a:off x="3337560" y="1783080"/>
-            <a:ext cx="2468880" cy="1280160"/>
-          </a:xfrm>
-          <a:prstGeom prst="rect">
-            <a:avLst/>
-          </a:prstGeom>
-          <a:noFill/>
-        </p:spPr>
-        <p:txBody>
-          <a:bodyPr wrap="square" lIns="0" rIns="0" tIns="0" bIns="0">
-            <a:noAutofit/>
-          </a:bodyPr>
-          <a:lstStyle/>
-          <a:p>
-            <a:pPr algn="l">
-              <a:lnSpc>
-                <a:spcPts val="2457"/>
-              </a:lnSpc>
-              <a:spcBef>
-                <a:spcPts val="0"/>
-              </a:spcBef>
-              <a:spcAft>
-                <a:spcPts val="0"/>
-              </a:spcAft>
-              <a:buNone/>
-              <a:defRPr sz="2100" b="0">
-                <a:solidFill>
-                  <a:srgbClr val="303437"/>
-                </a:solidFill>
-                <a:latin typeface="Noto Sans"/>
-              </a:defRPr>
-            </a:pPr>
-            <a:r>
-              <a:rPr sz="2100" b="1" lang="ja-JP" altLang="en-US">
-                <a:solidFill>
-                  <a:srgbClr val="303437"/>
-                </a:solidFill>
-                <a:latin typeface="Noto Sans"/>
-                <a:ea typeface="Noto Sans CJK JP"/>
-                <a:cs typeface="Noto Sans"/>
-              </a:rPr>
-              <a:t>主張を抽出・補完</a:t>
-            </a:r>
-          </a:p>
-          <a:p>
-            <a:pPr algn="l">
-              <a:lnSpc>
-                <a:spcPts val="2457"/>
-              </a:lnSpc>
-              <a:spcBef>
-                <a:spcPts val="0"/>
-              </a:spcBef>
-              <a:spcAft>
-                <a:spcPts val="0"/>
-              </a:spcAft>
-              <a:buNone/>
-              <a:defRPr sz="2100" b="0">
-                <a:solidFill>
-                  <a:srgbClr val="303437"/>
-                </a:solidFill>
-                <a:latin typeface="Noto Sans"/>
-              </a:defRPr>
-            </a:pPr>
-            <a:r>
-              <a:rPr sz="2100" b="1" lang="ja-JP" altLang="en-US">
-                <a:solidFill>
-                  <a:srgbClr val="303437"/>
-                </a:solidFill>
-                <a:latin typeface="Noto Sans"/>
-                <a:ea typeface="Noto Sans CJK JP"/>
-                <a:cs typeface="Noto Sans"/>
-              </a:rPr>
-              <a:t>時点・場所・断定文</a:t>
-            </a:r>
-          </a:p>
-        </p:txBody>
-      </p:sp>
-      <p:sp>
-        <p:nvSpPr>
-          <p:cNvPr id="6" name="TextBox 5"/>
-          <p:cNvSpPr txBox="1"/>
-          <p:nvPr/>
-        </p:nvSpPr>
-        <p:spPr>
-          <a:xfrm>
-            <a:off x="6355080" y="1783080"/>
-            <a:ext cx="2240280" cy="1280160"/>
-          </a:xfrm>
-          <a:prstGeom prst="rect">
-            <a:avLst/>
-          </a:prstGeom>
-          <a:noFill/>
-        </p:spPr>
-        <p:txBody>
-          <a:bodyPr wrap="square" lIns="0" rIns="0" tIns="0" bIns="0">
-            <a:noAutofit/>
-          </a:bodyPr>
-          <a:lstStyle/>
-          <a:p>
-            <a:pPr algn="l">
-              <a:lnSpc>
-                <a:spcPts val="2457"/>
-              </a:lnSpc>
-              <a:spcBef>
-                <a:spcPts val="0"/>
-              </a:spcBef>
-              <a:spcAft>
-                <a:spcPts val="0"/>
-              </a:spcAft>
-              <a:buNone/>
-              <a:defRPr sz="2100" b="0">
-                <a:solidFill>
-                  <a:srgbClr val="303437"/>
-                </a:solidFill>
-                <a:latin typeface="Noto Sans"/>
-              </a:defRPr>
-            </a:pPr>
-            <a:r>
-              <a:rPr sz="2100" b="1" lang="ja-JP" altLang="en-US">
-                <a:solidFill>
-                  <a:srgbClr val="303437"/>
-                </a:solidFill>
-                <a:latin typeface="Noto Sans"/>
-                <a:ea typeface="Noto Sans CJK JP"/>
-                <a:cs typeface="Noto Sans"/>
-              </a:rPr>
-              <a:t>根拠を検索・選択</a:t>
-            </a:r>
-          </a:p>
-          <a:p>
-            <a:pPr algn="l">
-              <a:lnSpc>
-                <a:spcPts val="2457"/>
-              </a:lnSpc>
-              <a:spcBef>
-                <a:spcPts val="0"/>
-              </a:spcBef>
-              <a:spcAft>
-                <a:spcPts val="0"/>
-              </a:spcAft>
-              <a:buNone/>
-              <a:defRPr sz="2100" b="0">
-                <a:solidFill>
-                  <a:srgbClr val="303437"/>
-                </a:solidFill>
-                <a:latin typeface="Noto Sans"/>
-              </a:defRPr>
-            </a:pPr>
-            <a:r>
-              <a:rPr sz="2100" b="1" lang="ja-JP" altLang="en-US">
-                <a:solidFill>
-                  <a:srgbClr val="303437"/>
-                </a:solidFill>
-                <a:latin typeface="Noto Sans"/>
-                <a:ea typeface="Noto Sans CJK JP"/>
-                <a:cs typeface="Noto Sans"/>
-              </a:rPr>
-              <a:t>最大5文／3分類</a:t>
-            </a:r>
-          </a:p>
-        </p:txBody>
-      </p:sp>
-      <p:sp>
-        <p:nvSpPr>
-          <p:cNvPr id="7" name="TextBox 6"/>
-          <p:cNvSpPr txBox="1"/>
-          <p:nvPr/>
-        </p:nvSpPr>
-        <p:spPr>
-          <a:xfrm>
-            <a:off x="2834640" y="2103120"/>
-            <a:ext cx="365760" cy="457200"/>
-          </a:xfrm>
-          <a:prstGeom prst="rect">
-            <a:avLst/>
-          </a:prstGeom>
-          <a:noFill/>
-        </p:spPr>
-        <p:txBody>
-          <a:bodyPr wrap="square" lIns="0" rIns="0" tIns="0" bIns="0">
-            <a:noAutofit/>
-          </a:bodyPr>
-          <a:lstStyle/>
-          <a:p>
-            <a:pPr algn="l">
-              <a:lnSpc>
-                <a:spcPts val="3158"/>
-              </a:lnSpc>
-              <a:spcBef>
-                <a:spcPts val="0"/>
-              </a:spcBef>
-              <a:spcAft>
-                <a:spcPts val="0"/>
-              </a:spcAft>
-              <a:buNone/>
-              <a:defRPr sz="2700" b="0">
-                <a:solidFill>
-                  <a:srgbClr val="303437"/>
-                </a:solidFill>
-                <a:latin typeface="Noto Sans"/>
-              </a:defRPr>
-            </a:pPr>
-            <a:r>
-              <a:rPr sz="2700" b="1" lang="ja-JP" altLang="en-US">
-                <a:solidFill>
-                  <a:srgbClr val="2C9100"/>
-                </a:solidFill>
-                <a:latin typeface="Noto Sans"/>
-                <a:ea typeface="Noto Sans CJK JP"/>
-                <a:cs typeface="Noto Sans"/>
-              </a:rPr>
-              <a:t>→</a:t>
-            </a:r>
-          </a:p>
-        </p:txBody>
-      </p:sp>
-      <p:sp>
-        <p:nvSpPr>
-          <p:cNvPr id="8" name="TextBox 7"/>
-          <p:cNvSpPr txBox="1"/>
-          <p:nvPr/>
-        </p:nvSpPr>
-        <p:spPr>
-          <a:xfrm>
-            <a:off x="5852160" y="2103120"/>
-            <a:ext cx="365760" cy="457200"/>
-          </a:xfrm>
-          <a:prstGeom prst="rect">
-            <a:avLst/>
-          </a:prstGeom>
-          <a:noFill/>
-        </p:spPr>
-        <p:txBody>
-          <a:bodyPr wrap="square" lIns="0" rIns="0" tIns="0" bIns="0">
-            <a:noAutofit/>
-          </a:bodyPr>
-          <a:lstStyle/>
-          <a:p>
-            <a:pPr algn="l">
-              <a:lnSpc>
-                <a:spcPts val="3158"/>
-              </a:lnSpc>
-              <a:spcBef>
-                <a:spcPts val="0"/>
-              </a:spcBef>
-              <a:spcAft>
-                <a:spcPts val="0"/>
-              </a:spcAft>
-              <a:buNone/>
-              <a:defRPr sz="2700" b="0">
-                <a:solidFill>
-                  <a:srgbClr val="303437"/>
-                </a:solidFill>
-                <a:latin typeface="Noto Sans"/>
-              </a:defRPr>
-            </a:pPr>
-            <a:r>
-              <a:rPr sz="2700" b="1" lang="ja-JP" altLang="en-US">
-                <a:solidFill>
-                  <a:srgbClr val="2C9100"/>
-                </a:solidFill>
-                <a:latin typeface="Noto Sans"/>
-                <a:ea typeface="Noto Sans CJK JP"/>
-                <a:cs typeface="Noto Sans"/>
-              </a:rPr>
-              <a:t>→</a:t>
-            </a:r>
-          </a:p>
-        </p:txBody>
-      </p:sp>
-      <p:sp>
-        <p:nvSpPr>
-          <p:cNvPr id="9" name="TextBox 8"/>
-          <p:cNvSpPr txBox="1"/>
-          <p:nvPr/>
-        </p:nvSpPr>
-        <p:spPr>
-          <a:xfrm>
-            <a:off x="594360" y="3474720"/>
-            <a:ext cx="7863840" cy="822960"/>
-          </a:xfrm>
-          <a:prstGeom prst="rect">
-            <a:avLst/>
-          </a:prstGeom>
-          <a:noFill/>
-        </p:spPr>
-        <p:txBody>
-          <a:bodyPr wrap="square" lIns="0" rIns="0" tIns="0" bIns="0">
-            <a:noAutofit/>
-          </a:bodyPr>
-          <a:lstStyle/>
-          <a:p>
-            <a:pPr algn="l">
-              <a:lnSpc>
-                <a:spcPts val="2340"/>
-              </a:lnSpc>
-              <a:spcBef>
-                <a:spcPts val="0"/>
-              </a:spcBef>
-              <a:spcAft>
-                <a:spcPts val="0"/>
-              </a:spcAft>
-              <a:buNone/>
-              <a:defRPr sz="2000" b="0">
-                <a:solidFill>
-                  <a:srgbClr val="303437"/>
-                </a:solidFill>
-                <a:latin typeface="Noto Sans"/>
-              </a:defRPr>
-            </a:pPr>
-            <a:r>
-              <a:rPr sz="2000" b="0" lang="ja-JP" altLang="en-US">
-                <a:solidFill>
-                  <a:srgbClr val="303437"/>
-                </a:solidFill>
-                <a:latin typeface="Noto Sans"/>
-                <a:ea typeface="Noto Sans CJK JP"/>
-                <a:cs typeface="Noto Sans"/>
-              </a:rPr>
-              <a:t>Google検索の上位10結果を収集し、誤情報サイトや答えを直接示す事実検証サイトを除く。残った文書から人が根拠文を選ぶ。</a:t>
-            </a:r>
-          </a:p>
-        </p:txBody>
-      </p:sp>
-      <p:sp>
-        <p:nvSpPr>
-          <p:cNvPr id="10" name="sources"/>
+          <p:cNvPr id="12" name="sources"/>
           <p:cNvSpPr txBox="1"/>
           <p:nvPr/>
         </p:nvSpPr>
@@ -10144,7 +9827,7 @@
                 <a:ea typeface="Noto Sans CJK JP"/>
                 <a:cs typeface="Noto Sans"/>
               </a:rPr>
-              <a:t>[1] Hu, Guo, Wu, Liu, Wen and Yu (2022). CHEF. NAACL-HLT, pp3362–3376.</a:t>
+              <a:t>[1] Hu et al. (2022). CHEF. NAACL-HLT.</a:t>
             </a:r>
             <a:r>
               <a:rPr sz="810" b="0" lang="ja-JP" altLang="en-US">
@@ -10233,7 +9916,7 @@
                 <a:ea typeface="Noto Sans CJK JP"/>
                 <a:cs typeface="Noto Sans"/>
               </a:rPr>
-              <a:t>原配布は、8,002／999／999件に分かれる</a:t>
+              <a:t>学習8,002件、開発・テスト各999件</a:t>
             </a:r>
           </a:p>
         </p:txBody>
@@ -11682,7 +11365,7 @@
                 <a:ea typeface="Noto Sans CJK JP"/>
                 <a:cs typeface="Noto Sans"/>
               </a:rPr>
-              <a:t>公式アーカイブの全件再集計。dev/testは各クラス333件。論文表のtrain反証4,399と、原配布4,349の差は補足で示す。</a:t>
+              <a:t>学習は反証が多く、開発・テストは3ラベルが各333件。</a:t>
             </a:r>
           </a:p>
         </p:txBody>
@@ -11736,7 +11419,7 @@
                 <a:ea typeface="Noto Sans CJK JP"/>
                 <a:cs typeface="Noto Sans"/>
               </a:rPr>
-              <a:t>[1] THU-BPM. CHEF公式CHEF.tar.gz、train/dev/test原JSON。</a:t>
+              <a:t>[1] THU-BPM. CHEF データセット。</a:t>
             </a:r>
             <a:r>
               <a:rPr sz="810" b="0" lang="ja-JP" altLang="en-US">
@@ -11928,7 +11611,7 @@
                           <a:ea typeface="Noto Sans CJK JP"/>
                           <a:cs typeface="Noto Sans"/>
                         </a:rPr>
-                        <a:t>domain原表記</a:t>
+                        <a:t>分野</a:t>
                       </a:r>
                     </a:p>
                   </a:txBody>
@@ -12098,7 +11781,7 @@
                           <a:ea typeface="Noto Sans CJK JP"/>
                           <a:cs typeface="Noto Sans"/>
                         </a:rPr>
-                        <a:t>公卫 / 公衆衛生</a:t>
+                        <a:t>公衆衛生</a:t>
                       </a:r>
                     </a:p>
                   </a:txBody>
@@ -13005,61 +12688,7 @@
       </p:graphicFrame>
       <p:sp>
         <p:nvSpPr>
-          <p:cNvPr id="5" name="TextBox 4"/>
-          <p:cNvSpPr txBox="1"/>
-          <p:nvPr/>
-        </p:nvSpPr>
-        <p:spPr>
-          <a:xfrm>
-            <a:off x="594360" y="4203953"/>
-            <a:ext cx="7955279" cy="658368"/>
-          </a:xfrm>
-          <a:prstGeom prst="rect">
-            <a:avLst/>
-          </a:prstGeom>
-          <a:noFill/>
-        </p:spPr>
-        <p:txBody>
-          <a:bodyPr wrap="square" lIns="0" rIns="0" tIns="0" bIns="0">
-            <a:noAutofit/>
-          </a:bodyPr>
-          <a:lstStyle/>
-          <a:p>
-            <a:pPr algn="l">
-              <a:lnSpc>
-                <a:spcPts val="2047"/>
-              </a:lnSpc>
-              <a:spcBef>
-                <a:spcPts val="0"/>
-              </a:spcBef>
-              <a:spcAft>
-                <a:spcPts val="0"/>
-              </a:spcAft>
-              <a:buNone/>
-              <a:defRPr sz="1750" b="0">
-                <a:solidFill>
-                  <a:srgbClr val="303437"/>
-                </a:solidFill>
-                <a:latin typeface="Noto Sans"/>
-              </a:defRPr>
-            </a:pPr>
-            <a:r>
-              <a:rPr sz="1750" b="0" lang="ja-JP" altLang="en-US">
-                <a:solidFill>
-                  <a:srgbClr val="303437"/>
-                </a:solidFill>
-                <a:latin typeface="Noto Sans"/>
-                <a:ea typeface="Noto Sans CJK JP"/>
-                <a:cs typeface="Noto Sans"/>
-              </a:rPr>
-              <a:t>原配布の全件集計。「生活」7件も原表記のまま含む。</a:t>
-            </a:r>
-          </a:p>
-        </p:txBody>
-      </p:sp>
-      <p:sp>
-        <p:nvSpPr>
-          <p:cNvPr id="6" name="sources"/>
+          <p:cNvPr id="5" name="sources"/>
           <p:cNvSpPr txBox="1"/>
           <p:nvPr/>
         </p:nvSpPr>
@@ -13106,7 +12735,7 @@
                 <a:ea typeface="Noto Sans CJK JP"/>
                 <a:cs typeface="Noto Sans"/>
               </a:rPr>
-              <a:t>[1] THU-BPM. CHEF公式CHEF.tar.gz、train/dev/test原JSON。</a:t>
+              <a:t>[1] THU-BPM. CHEF データセット。</a:t>
             </a:r>
             <a:r>
               <a:rPr sz="810" b="0" lang="ja-JP" altLang="en-US">
@@ -13281,36 +12910,6 @@
               <a:t>310件の主張を5人が再注釈し、Fleissのκは0.74。さらに別の310件では、根拠だけから付けたラベルの正答率は88.7％、十分な情報があるとされた例が83.6％だった。</a:t>
             </a:r>
           </a:p>
-          <a:p>
-            <a:pPr marL="457200" indent="-355600">
-              <a:lnSpc>
-                <a:spcPts val="2439"/>
-              </a:lnSpc>
-              <a:spcAft>
-                <a:spcPts val="0"/>
-              </a:spcAft>
-              <a:buSzPct val="64878"/>
-              <a:buFont typeface="Noto Sans CJK JP"/>
-              <a:buChar char="●"/>
-              <a:defRPr sz="2050" b="0">
-                <a:solidFill>
-                  <a:srgbClr val="303437"/>
-                </a:solidFill>
-                <a:latin typeface="Noto Sans"/>
-              </a:defRPr>
-            </a:pPr>
-            <a:r>
-              <a:rPr sz="2050" b="0" lang="ja-JP" altLang="en-US">
-                <a:solidFill>
-                  <a:srgbClr val="303437"/>
-                </a:solidFill>
-                <a:latin typeface="Noto Sans"/>
-                <a:ea typeface="Noto Sans CJK JP"/>
-                <a:cs typeface="Noto Sans"/>
-              </a:rPr>
-              <a:t>根拠文は多ければよいわけではない。関連性と判断に十分な情報があるかを確認して選ぶ。</a:t>
-            </a:r>
-          </a:p>
         </p:txBody>
       </p:sp>
       <p:sp>
@@ -13410,7 +13009,7 @@
                 <a:ea typeface="Noto Sans CJK JP"/>
                 <a:cs typeface="Noto Sans"/>
               </a:rPr>
-              <a:t>[1] Hu, Guo, Wu, Liu, Wen and Yu (2022). CHEF. NAACL-HLT, pp3362–3376.</a:t>
+              <a:t>[1] Hu et al. (2022). CHEF. NAACL-HLT.</a:t>
             </a:r>
             <a:r>
               <a:rPr sz="810" b="0" lang="ja-JP" altLang="en-US">
@@ -13625,7 +13224,7 @@
                 <a:ea typeface="Noto Sans CJK JP"/>
                 <a:cs typeface="Noto Sans"/>
               </a:rPr>
-              <a:t>[1] THU-BPM. CHEF公式配布。commit8909b3035c、2026-10-18取得。</a:t>
+              <a:t>[1] THU-BPM. CHEF 公式データ・実装。</a:t>
             </a:r>
             <a:r>
               <a:rPr sz="810" b="0" lang="ja-JP" altLang="en-US">
@@ -14307,7 +13906,7 @@
                           <a:ea typeface="Noto Sans CJK JP"/>
                           <a:cs typeface="Noto Sans"/>
                         </a:rPr>
-                        <a:t>人が選んだ根拠を直接与え、検索の影響を分けて見る</a:t>
+                        <a:t>人が選んだ根拠を直接与え、分類の性能を測る</a:t>
                       </a:r>
                     </a:p>
                   </a:txBody>
@@ -14386,7 +13985,7 @@
                 <a:ea typeface="Noto Sans CJK JP"/>
                 <a:cs typeface="Noto Sans"/>
               </a:rPr>
-              <a:t>[1] Hu, Guo, Wu, Liu, Wen and Yu (2022). CHEF. NAACL-HLT, pp3362–3376.</a:t>
+              <a:t>[1] Hu et al. (2022). CHEF. NAACL-HLT.</a:t>
             </a:r>
             <a:r>
               <a:rPr sz="810" b="0" lang="ja-JP" altLang="en-US">
@@ -14588,7 +14187,7 @@
                 <a:ea typeface="Noto Sans CJK JP"/>
                 <a:cs typeface="Noto Sans"/>
               </a:rPr>
-              <a:t>testは999件でクラスは均等。根拠選択まで含む値と、人の根拠を与えた値を区別する。</a:t>
+              <a:t>テストは999件で各クラス333件。根拠を選ぶ段階から評価する条件と、人が選んだ根拠を直接与える条件を比較する。</a:t>
             </a:r>
           </a:p>
         </p:txBody>
@@ -14690,7 +14289,7 @@
                 <a:ea typeface="Noto Sans CJK JP"/>
                 <a:cs typeface="Noto Sans"/>
               </a:rPr>
-              <a:t>[1] Hu, Guo, Wu, Liu, Wen and Yu (2022). CHEF. NAACL-HLT, pp3362–3376.</a:t>
+              <a:t>[1] Hu et al. (2022). CHEF. NAACL-HLT.</a:t>
             </a:r>
             <a:r>
               <a:rPr sz="810" b="0" lang="ja-JP" altLang="en-US">
@@ -15702,7 +15301,7 @@
                 <a:ea typeface="Noto Sans CJK JP"/>
                 <a:cs typeface="Noto Sans"/>
               </a:rPr>
-              <a:t>百分率スケールの平均±標準偏差。5独立実行。単一分類器の条件比較。</a:t>
+              <a:t>F1（％）。同じBERT分類器を使い、5回の実行の平均±標準偏差を示す。</a:t>
             </a:r>
           </a:p>
         </p:txBody>
@@ -15756,7 +15355,7 @@
                 <a:ea typeface="Noto Sans CJK JP"/>
                 <a:cs typeface="Noto Sans"/>
               </a:rPr>
-              <a:t>[1] Hu, Guo, Wu, Liu, Wen and Yu (2022). CHEF. NAACL-HLT, pp3362–3376.</a:t>
+              <a:t>[1] Hu et al. (2022). CHEF. NAACL-HLT.</a:t>
             </a:r>
             <a:r>
               <a:rPr sz="810" b="0" lang="ja-JP" altLang="en-US">
@@ -15965,7 +15564,7 @@
                 <a:ea typeface="Noto Sans CJK JP"/>
                 <a:cs typeface="Noto Sans"/>
               </a:rPr>
-              <a:t>BERT系のMacro F1（0–100）。分類器と根拠条件を対応させた固定比較。</a:t>
+              <a:t>同じBERT分類器で、根拠の与え方を変えたMacro F1（％）。</a:t>
             </a:r>
           </a:p>
         </p:txBody>
@@ -16019,7 +15618,7 @@
                 <a:ea typeface="Noto Sans CJK JP"/>
                 <a:cs typeface="Noto Sans"/>
               </a:rPr>
-              <a:t>[1] Hu, Guo, Wu, Liu, Wen and Yu (2022). CHEF. NAACL-HLT, pp3362–3376.</a:t>
+              <a:t>[1] Hu et al. (2022). CHEF. NAACL-HLT.</a:t>
             </a:r>
             <a:r>
               <a:rPr sz="810" b="0" lang="ja-JP" altLang="en-US">
@@ -16108,7 +15707,7 @@
                 <a:ea typeface="Noto Sans CJK JP"/>
                 <a:cs typeface="Noto Sans"/>
               </a:rPr>
-              <a:t>検索の失敗と、根拠からの推論を分ける</a:t>
+              <a:t>根拠検索が、事実検証の課題になる</a:t>
             </a:r>
           </a:p>
         </p:txBody>
@@ -16323,7 +15922,7 @@
                 <a:ea typeface="Noto Sans CJK JP"/>
                 <a:cs typeface="Noto Sans"/>
               </a:rPr>
-              <a:t>[1] Hu, Guo, Wu, Liu, Wen and Yu (2022). CHEF. NAACL-HLT, pp3362–3376.</a:t>
+              <a:t>[1] Hu et al. (2022). CHEF. NAACL-HLT.</a:t>
             </a:r>
             <a:r>
               <a:rPr sz="810" b="0" lang="ja-JP" altLang="en-US">
@@ -16412,7 +16011,7 @@
                 <a:ea typeface="Noto Sans CJK JP"/>
                 <a:cs typeface="Noto Sans"/>
               </a:rPr>
-              <a:t>CLEVAでの採用と利用</a:t>
+              <a:t>利用方法と、CLEVAへの応用</a:t>
             </a:r>
           </a:p>
         </p:txBody>
@@ -16460,7 +16059,7 @@
                 <a:ea typeface="Noto Sans CJK JP"/>
                 <a:cs typeface="Noto Sans"/>
               </a:rPr>
-              <a:t>4. CLEVAでの採用と利用</a:t>
+              <a:t>4. 利用方法と、CLEVAへの応用</a:t>
             </a:r>
           </a:p>
         </p:txBody>
@@ -16526,7 +16125,7 @@
                 <a:ea typeface="Noto Sans CJK JP"/>
                 <a:cs typeface="Noto Sans"/>
               </a:rPr>
-              <a:t>CLEVAでは、事実確認の選択式課題に採用</a:t>
+              <a:t>CLEVAでは、主張を三択で判定する</a:t>
             </a:r>
           </a:p>
         </p:txBody>
@@ -16579,7 +16178,7 @@
                 <a:ea typeface="Noto Sans CJK JP"/>
                 <a:cs typeface="Noto Sans"/>
               </a:rPr>
-              <a:t>CLEVAは中国語モデル評価のプラットフォームで、事実確認課題の素材としてCHEFを採用した。元データセットとプラットフォームは別の対象である。</a:t>
+              <a:t>中国語モデル評価プラットフォームCLEVAは、事実確認課題にCHEFの主張を採用した。</a:t>
             </a:r>
           </a:p>
           <a:p>
@@ -16609,7 +16208,7 @@
                 <a:ea typeface="Noto Sans CJK JP"/>
                 <a:cs typeface="Noto Sans"/>
               </a:rPr>
-              <a:t>HELM v0.4.0の公開コードには、金星の主張に「真实・虚假・信息不足」から答える例がある。この例は根拠文を入力に表示しない。</a:t>
+              <a:t>HELMの公開コードにある金星の例は、「真实・虚假・信息不足」から答える三択式で、根拠文を入力に含めない。元のCHEFには、根拠を検索・選択する課題もある。</a:t>
             </a:r>
           </a:p>
           <a:p>
@@ -16639,7 +16238,7 @@
                 <a:ea typeface="Noto Sans CJK JP"/>
                 <a:cs typeface="Noto Sans"/>
               </a:rPr>
-              <a:t>元のCHEFが持つ検索文書・注釈根拠付きの検証と、公開コードに示された主張中心の入力を区別する。</a:t>
+              <a:t>CLEVAで使われた全問題や抽出範囲は、公開説明からは確認できない。</a:t>
             </a:r>
           </a:p>
         </p:txBody>
@@ -16687,7 +16286,7 @@
                 <a:ea typeface="Noto Sans CJK JP"/>
                 <a:cs typeface="Noto Sans"/>
               </a:rPr>
-              <a:t>4. CLEVAでの採用と利用</a:t>
+              <a:t>4. 利用方法と、CLEVAへの応用</a:t>
             </a:r>
           </a:p>
         </p:txBody>
@@ -16741,7 +16340,7 @@
                 <a:ea typeface="Noto Sans CJK JP"/>
                 <a:cs typeface="Noto Sans"/>
               </a:rPr>
-              <a:t>[1] Li et al. (2023). CLEVA: Chinese Language Models EVAluation Platform. EMNLP System Demonstrations.</a:t>
+              <a:t>[1] Li et al. (2023). CLEVA. EMNLP System Demonstrations.</a:t>
             </a:r>
             <a:r>
               <a:rPr sz="810" b="0" lang="ja-JP" altLang="en-US">
@@ -16792,7 +16391,7 @@
                 <a:ea typeface="Noto Sans CJK JP"/>
                 <a:cs typeface="Noto Sans"/>
               </a:rPr>
-              <a:t>[2] Stanford CRFM. CLEVAFactCheckingScenario, HELM v0.4.0.</a:t>
+              <a:t>[2] Stanford CRFM. HELM: CLEVAFactCheckingScenario.</a:t>
             </a:r>
             <a:r>
               <a:rPr sz="810" b="0" lang="ja-JP" altLang="en-US">
@@ -16881,7 +16480,7 @@
                 <a:ea typeface="Noto Sans CJK JP"/>
                 <a:cs typeface="Noto Sans"/>
               </a:rPr>
-              <a:t>公開コードの金星例と、元レコード</a:t>
+              <a:t>CLEVAでの出題例：金星の生命発見</a:t>
             </a:r>
           </a:p>
         </p:txBody>
@@ -16929,7 +16528,7 @@
                 <a:ea typeface="Noto Sans CJK JP"/>
                 <a:cs typeface="Noto Sans"/>
               </a:rPr>
-              <a:t>4. CLEVAでの採用と利用</a:t>
+              <a:t>4. 利用方法と、CLEVAへの応用</a:t>
             </a:r>
           </a:p>
         </p:txBody>
@@ -17317,7 +16916,7 @@
                 <a:ea typeface="Noto Sans CJK JP"/>
                 <a:cs typeface="Noto Sans"/>
               </a:rPr>
-              <a:t>公開例の正解：A ／ 元CHEF：支持（0）</a:t>
+              <a:t>正解：A（真実）／ CHEFでは支持</a:t>
             </a:r>
           </a:p>
         </p:txBody>
@@ -17352,7 +16951,7 @@
                 <a:spcPts val="0"/>
               </a:spcBef>
               <a:spcAft>
-                <a:spcPts val="140"/>
+                <a:spcPts val="400"/>
               </a:spcAft>
               <a:buNone/>
               <a:defRPr sz="810" b="0">
@@ -17371,25 +16970,19 @@
                 <a:ea typeface="Noto Sans CJK JP"/>
                 <a:cs typeface="Noto Sans"/>
               </a:rPr>
-              <a:t>[1] Stanford CRFM. CLEVAFactCheckingScenario, HELM v0.4.0. 同一claimはtrain row128 / claimId977。選択肢順はこの公開例のもの。</a:t>
-            </a:r>
-          </a:p>
-          <a:p>
-            <a:pPr>
-              <a:lnSpc>
-                <a:spcPts val="940"/>
-              </a:lnSpc>
-              <a:spcAft>
-                <a:spcPts val="400"/>
-              </a:spcAft>
-              <a:buNone/>
-              <a:defRPr sz="810" b="0">
-                <a:solidFill>
-                  <a:srgbClr val="303437"/>
-                </a:solidFill>
-                <a:latin typeface="Noto Sans"/>
-              </a:defRPr>
-            </a:pPr>
+              <a:t>[1] Stanford CRFM. HELM: CLEVAFactCheckingScenario.</a:t>
+            </a:r>
+            <a:r>
+              <a:rPr sz="810" b="0" lang="ja-JP" altLang="en-US">
+                <a:solidFill>
+                  <a:srgbClr val="626669"/>
+                </a:solidFill>
+                <a:latin typeface="Noto Sans"/>
+                <a:ea typeface="Noto Sans CJK JP"/>
+                <a:cs typeface="Noto Sans"/>
+              </a:rPr>
+              <a:t>  </a:t>
+            </a:r>
             <a:r>
               <a:rPr sz="810" b="0" lang="ja-JP" altLang="en-US">
                 <a:solidFill>
@@ -17466,7 +17059,7 @@
                 <a:ea typeface="Noto Sans CJK JP"/>
                 <a:cs typeface="Noto Sans"/>
               </a:rPr>
-              <a:t>原データを固定し、採用版の違いを残す</a:t>
+              <a:t>主張・検索文書・根拠をJSONで取得する</a:t>
             </a:r>
           </a:p>
         </p:txBody>
@@ -17519,7 +17112,7 @@
                 <a:ea typeface="Noto Sans CJK JP"/>
                 <a:cs typeface="Noto Sans"/>
               </a:rPr>
-              <a:t>公式配布のtrain/dev/testでは、主張・検索文書・注釈根拠・ラベルを対応付けられる。split・行位置・claimIdを組み合わせ、元レコードをたどれる。</a:t>
+              <a:t>公式リポジトリからCHEF.tar.gzを取得すると、学習・開発・テスト用のJSONが得られる。</a:t>
             </a:r>
           </a:p>
           <a:p>
@@ -17549,7 +17142,7 @@
                 <a:ea typeface="Noto Sans CJK JP"/>
                 <a:cs typeface="Noto Sans"/>
               </a:rPr>
-              <a:t>CLEVA v1の配布は現在取得できず、元CHEFの全件と同一集合・同一入力とは確認できていない。HELM Classic v0.4.0の公開run一覧で、該当実行は0件だった。</a:t>
+              <a:t>claimは主張、labelは3分類の正解。evidenceは検索文書、gold evidenceは人が選んだ根拠を格納する。</a:t>
             </a:r>
           </a:p>
           <a:p>
@@ -17579,7 +17172,7 @@
                 <a:ea typeface="Noto Sans CJK JP"/>
                 <a:cs typeface="Noto Sans"/>
               </a:rPr>
-              <a:t>根拠本文や記事の著作権は各提供元に帰属する。コード内のライセンスと、データ全体の利用許諾を同一視せず、公式配布と出典を確認して利用する。</a:t>
+              <a:t>Joint/LICENSEのMITライセンスは実装コードへの許諾。データ全体の利用許諾は明示されておらず、記事本文の権利は各提供元に帰属する。</a:t>
             </a:r>
           </a:p>
         </p:txBody>
@@ -17627,7 +17220,7 @@
                 <a:ea typeface="Noto Sans CJK JP"/>
                 <a:cs typeface="Noto Sans"/>
               </a:rPr>
-              <a:t>4. CLEVAでの採用と利用</a:t>
+              <a:t>4. 利用方法と、CLEVAへの応用</a:t>
             </a:r>
           </a:p>
         </p:txBody>
@@ -17681,7 +17274,7 @@
                 <a:ea typeface="Noto Sans CJK JP"/>
                 <a:cs typeface="Noto Sans"/>
               </a:rPr>
-              <a:t>[1] THU-BPM. CHEF公式配布。commit8909b3035c、2026-10-18取得。</a:t>
+              <a:t>[1] THU-BPM. CHEF 公式データ・実装。</a:t>
             </a:r>
             <a:r>
               <a:rPr sz="810" b="0" lang="ja-JP" altLang="en-US">
@@ -17732,7 +17325,7 @@
                 <a:ea typeface="Noto Sans CJK JP"/>
                 <a:cs typeface="Noto Sans"/>
               </a:rPr>
-              <a:t>[2] Stanford CRFM. CLEVAFactCheckingScenario, HELM v0.4.0.</a:t>
+              <a:t>[2] Stanford CRFM. HELM: CLEVAFactCheckingScenario.</a:t>
             </a:r>
             <a:r>
               <a:rPr sz="810" b="0" lang="ja-JP" altLang="en-US">
@@ -17964,7 +17557,7 @@
                 <a:ea typeface="Noto Sans CJK JP"/>
                 <a:cs typeface="Noto Sans"/>
               </a:rPr>
-              <a:t>CLEVAでの採用と利用</a:t>
+              <a:t>利用方法と、CLEVAへの応用</a:t>
             </a:r>
           </a:p>
         </p:txBody>
@@ -18161,7 +17754,7 @@
                 <a:ea typeface="Noto Sans CJK JP"/>
                 <a:cs typeface="Noto Sans"/>
               </a:rPr>
-              <a:t>支持・反証・情報不足は、与えられた根拠と主張の範囲に対応する。成都の例では人数の地域範囲、金星の例では発見と推測の差が要点になる。</a:t>
+              <a:t>支持・反証・情報不足は、根拠と主張の関係を表す。成都の例では人数の地域範囲、金星の例では発見と推測の差が判断の要点になる。</a:t>
             </a:r>
           </a:p>
           <a:p>
@@ -18191,7 +17784,7 @@
                 <a:ea typeface="Noto Sans CJK JP"/>
                 <a:cs typeface="Noto Sans"/>
               </a:rPr>
-              <a:t>元の根拠付き課題、根拠を選ぶ評価、CLEVAの公開入力例を分けると、何を解かせた成績なのかを理解できる。</a:t>
+              <a:t>人が選んだ根拠を与えた場合より、根拠を検索・選択する場合の成績が低く、必要な根拠を見つけることが課題として残る。</a:t>
             </a:r>
           </a:p>
         </p:txBody>
@@ -18239,7 +17832,7 @@
                 <a:ea typeface="Noto Sans CJK JP"/>
                 <a:cs typeface="Noto Sans"/>
               </a:rPr>
-              <a:t>4. CLEVAでの採用と利用</a:t>
+              <a:t>4. 利用方法と、CLEVAへの応用</a:t>
             </a:r>
           </a:p>
         </p:txBody>
@@ -18293,7 +17886,7 @@
                 <a:ea typeface="Noto Sans CJK JP"/>
                 <a:cs typeface="Noto Sans"/>
               </a:rPr>
-              <a:t>[1] Hu, Guo, Wu, Liu, Wen and Yu (2022). CHEF. NAACL-HLT, pp3362–3376.</a:t>
+              <a:t>[1] Hu et al. (2022). CHEF. NAACL-HLT.</a:t>
             </a:r>
             <a:r>
               <a:rPr sz="810" b="0" lang="ja-JP" altLang="en-US">
@@ -18344,7 +17937,7 @@
                 <a:ea typeface="Noto Sans CJK JP"/>
                 <a:cs typeface="Noto Sans"/>
               </a:rPr>
-              <a:t>[2] Li et al. (2023). CLEVA: Chinese Language Models EVAluation Platform. EMNLP System Demonstrations.</a:t>
+              <a:t>[2] Li et al. (2023). CLEVA. EMNLP System Demonstrations.</a:t>
             </a:r>
             <a:r>
               <a:rPr sz="810" b="0" lang="ja-JP" altLang="en-US">
@@ -18630,7 +18223,7 @@
                 <a:ea typeface="Noto Sans CJK JP"/>
                 <a:cs typeface="Noto Sans"/>
               </a:rPr>
-              <a:t>配布・注釈・評価の補足</a:t>
+              <a:t>根拠データの特徴と評価結果</a:t>
             </a:r>
           </a:p>
           <a:p>
@@ -18990,7 +18583,7 @@
                 <a:ea typeface="Noto Sans CJK JP"/>
                 <a:cs typeface="Noto Sans"/>
               </a:rPr>
-              <a:t>中国語：主張と注釈根拠の全文</a:t>
+              <a:t>中国語：主張と根拠の全文</a:t>
             </a:r>
           </a:p>
         </p:txBody>
@@ -19242,7 +18835,7 @@
                 <a:ea typeface="Noto Sans CJK JP"/>
                 <a:cs typeface="Noto Sans"/>
               </a:rPr>
-              <a:t>配布ラベル：支持 / SUP</a:t>
+              <a:t>正解：支持</a:t>
             </a:r>
           </a:p>
         </p:txBody>
@@ -19277,7 +18870,7 @@
                 <a:spcPts val="0"/>
               </a:spcBef>
               <a:spcAft>
-                <a:spcPts val="140"/>
+                <a:spcPts val="400"/>
               </a:spcAft>
               <a:buNone/>
               <a:defRPr sz="810" b="0">
@@ -19296,25 +18889,19 @@
                 <a:ea typeface="Noto Sans CJK JP"/>
                 <a:cs typeface="Noto Sans"/>
               </a:rPr>
-              <a:t>[1] THU-BPM. CHEF公式CHEF.tar.gz、train/dev/test原JSON。 train row11 / claimId82 / 根拠3文</a:t>
-            </a:r>
-          </a:p>
-          <a:p>
-            <a:pPr>
-              <a:lnSpc>
-                <a:spcPts val="940"/>
-              </a:lnSpc>
-              <a:spcAft>
-                <a:spcPts val="400"/>
-              </a:spcAft>
-              <a:buNone/>
-              <a:defRPr sz="810" b="0">
-                <a:solidFill>
-                  <a:srgbClr val="303437"/>
-                </a:solidFill>
-                <a:latin typeface="Noto Sans"/>
-              </a:defRPr>
-            </a:pPr>
+              <a:t>[1] THU-BPM. CHEF データセット。</a:t>
+            </a:r>
+            <a:r>
+              <a:rPr sz="810" b="0" lang="ja-JP" altLang="en-US">
+                <a:solidFill>
+                  <a:srgbClr val="626669"/>
+                </a:solidFill>
+                <a:latin typeface="Noto Sans"/>
+                <a:ea typeface="Noto Sans CJK JP"/>
+                <a:cs typeface="Noto Sans"/>
+              </a:rPr>
+              <a:t>  </a:t>
+            </a:r>
             <a:r>
               <a:rPr sz="810" b="0" lang="ja-JP" altLang="en-US">
                 <a:solidFill>
@@ -19493,7 +19080,7 @@
                 <a:ea typeface="Noto Sans CJK JP"/>
                 <a:cs typeface="Noto Sans"/>
               </a:rPr>
-              <a:t>日本語訳：主張と注釈根拠の全文</a:t>
+              <a:t>日本語訳：主張と根拠の全文</a:t>
             </a:r>
           </a:p>
         </p:txBody>
@@ -19598,7 +19185,7 @@
                 <a:ea typeface="Noto Sans CJK JP"/>
                 <a:cs typeface="Noto Sans"/>
               </a:rPr>
-              <a:t>注釈根拠：</a:t>
+              <a:t>根拠：</a:t>
             </a:r>
           </a:p>
           <a:p>
@@ -19745,7 +19332,7 @@
                 <a:ea typeface="Noto Sans CJK JP"/>
                 <a:cs typeface="Noto Sans"/>
               </a:rPr>
-              <a:t>配布ラベル：支持 / SUP</a:t>
+              <a:t>正解：支持</a:t>
             </a:r>
           </a:p>
         </p:txBody>
@@ -19780,7 +19367,7 @@
                 <a:spcPts val="0"/>
               </a:spcBef>
               <a:spcAft>
-                <a:spcPts val="140"/>
+                <a:spcPts val="400"/>
               </a:spcAft>
               <a:buNone/>
               <a:defRPr sz="810" b="0">
@@ -19799,25 +19386,19 @@
                 <a:ea typeface="Noto Sans CJK JP"/>
                 <a:cs typeface="Noto Sans"/>
               </a:rPr>
-              <a:t>[1] THU-BPM. CHEF公式CHEF.tar.gz、train/dev/test原JSON。 train row11 / claimId82 / 根拠3文</a:t>
-            </a:r>
-          </a:p>
-          <a:p>
-            <a:pPr>
-              <a:lnSpc>
-                <a:spcPts val="940"/>
-              </a:lnSpc>
-              <a:spcAft>
-                <a:spcPts val="400"/>
-              </a:spcAft>
-              <a:buNone/>
-              <a:defRPr sz="810" b="0">
-                <a:solidFill>
-                  <a:srgbClr val="303437"/>
-                </a:solidFill>
-                <a:latin typeface="Noto Sans"/>
-              </a:defRPr>
-            </a:pPr>
+              <a:t>[1] THU-BPM. CHEF データセット。</a:t>
+            </a:r>
+            <a:r>
+              <a:rPr sz="810" b="0" lang="ja-JP" altLang="en-US">
+                <a:solidFill>
+                  <a:srgbClr val="626669"/>
+                </a:solidFill>
+                <a:latin typeface="Noto Sans"/>
+                <a:ea typeface="Noto Sans CJK JP"/>
+                <a:cs typeface="Noto Sans"/>
+              </a:rPr>
+              <a:t>  </a:t>
+            </a:r>
             <a:r>
               <a:rPr sz="810" b="0" lang="ja-JP" altLang="en-US">
                 <a:solidFill>
@@ -19996,7 +19577,7 @@
                 <a:ea typeface="Noto Sans CJK JP"/>
                 <a:cs typeface="Noto Sans"/>
               </a:rPr>
-              <a:t>中国語：主張と注釈根拠の全文 ／ 日本語訳</a:t>
+              <a:t>中国語：主張と根拠の全文 ／ 日本語訳</a:t>
             </a:r>
           </a:p>
         </p:txBody>
@@ -20237,7 +19818,7 @@
                 <a:ea typeface="Noto Sans CJK JP"/>
                 <a:cs typeface="Noto Sans"/>
               </a:rPr>
-              <a:t>注釈根拠：</a:t>
+              <a:t>根拠：</a:t>
             </a:r>
           </a:p>
           <a:p>
@@ -20322,7 +19903,7 @@
                 <a:ea typeface="Noto Sans CJK JP"/>
                 <a:cs typeface="Noto Sans"/>
               </a:rPr>
-              <a:t>配布ラベル：反証 / REF</a:t>
+              <a:t>正解：反証</a:t>
             </a:r>
           </a:p>
         </p:txBody>
@@ -20357,7 +19938,7 @@
                 <a:spcPts val="0"/>
               </a:spcBef>
               <a:spcAft>
-                <a:spcPts val="140"/>
+                <a:spcPts val="400"/>
               </a:spcAft>
               <a:buNone/>
               <a:defRPr sz="810" b="0">
@@ -20376,25 +19957,19 @@
                 <a:ea typeface="Noto Sans CJK JP"/>
                 <a:cs typeface="Noto Sans"/>
               </a:rPr>
-              <a:t>[1] THU-BPM. CHEF公式CHEF.tar.gz、train/dev/test原JSON。 dev row337 / claimId1724 / 根拠1文</a:t>
-            </a:r>
-          </a:p>
-          <a:p>
-            <a:pPr>
-              <a:lnSpc>
-                <a:spcPts val="940"/>
-              </a:lnSpc>
-              <a:spcAft>
-                <a:spcPts val="400"/>
-              </a:spcAft>
-              <a:buNone/>
-              <a:defRPr sz="810" b="0">
-                <a:solidFill>
-                  <a:srgbClr val="303437"/>
-                </a:solidFill>
-                <a:latin typeface="Noto Sans"/>
-              </a:defRPr>
-            </a:pPr>
+              <a:t>[1] THU-BPM. CHEF データセット。</a:t>
+            </a:r>
+            <a:r>
+              <a:rPr sz="810" b="0" lang="ja-JP" altLang="en-US">
+                <a:solidFill>
+                  <a:srgbClr val="626669"/>
+                </a:solidFill>
+                <a:latin typeface="Noto Sans"/>
+                <a:ea typeface="Noto Sans CJK JP"/>
+                <a:cs typeface="Noto Sans"/>
+              </a:rPr>
+              <a:t>  </a:t>
+            </a:r>
             <a:r>
               <a:rPr sz="810" b="0" lang="ja-JP" altLang="en-US">
                 <a:solidFill>
@@ -20573,7 +20148,7 @@
                 <a:ea typeface="Noto Sans CJK JP"/>
                 <a:cs typeface="Noto Sans"/>
               </a:rPr>
-              <a:t>中国語：主張と注釈根拠の全文</a:t>
+              <a:t>中国語：主張と根拠の全文</a:t>
             </a:r>
           </a:p>
         </p:txBody>
@@ -20825,7 +20400,7 @@
                 <a:ea typeface="Noto Sans CJK JP"/>
                 <a:cs typeface="Noto Sans"/>
               </a:rPr>
-              <a:t>配布ラベル：反証 / REF</a:t>
+              <a:t>正解：反証</a:t>
             </a:r>
           </a:p>
         </p:txBody>
@@ -20860,7 +20435,7 @@
                 <a:spcPts val="0"/>
               </a:spcBef>
               <a:spcAft>
-                <a:spcPts val="140"/>
+                <a:spcPts val="400"/>
               </a:spcAft>
               <a:buNone/>
               <a:defRPr sz="810" b="0">
@@ -20879,25 +20454,19 @@
                 <a:ea typeface="Noto Sans CJK JP"/>
                 <a:cs typeface="Noto Sans"/>
               </a:rPr>
-              <a:t>[1] THU-BPM. CHEF公式CHEF.tar.gz、train/dev/test原JSON。 dev row348 / claimId1201 / 根拠3文</a:t>
-            </a:r>
-          </a:p>
-          <a:p>
-            <a:pPr>
-              <a:lnSpc>
-                <a:spcPts val="940"/>
-              </a:lnSpc>
-              <a:spcAft>
-                <a:spcPts val="400"/>
-              </a:spcAft>
-              <a:buNone/>
-              <a:defRPr sz="810" b="0">
-                <a:solidFill>
-                  <a:srgbClr val="303437"/>
-                </a:solidFill>
-                <a:latin typeface="Noto Sans"/>
-              </a:defRPr>
-            </a:pPr>
+              <a:t>[1] THU-BPM. CHEF データセット。</a:t>
+            </a:r>
+            <a:r>
+              <a:rPr sz="810" b="0" lang="ja-JP" altLang="en-US">
+                <a:solidFill>
+                  <a:srgbClr val="626669"/>
+                </a:solidFill>
+                <a:latin typeface="Noto Sans"/>
+                <a:ea typeface="Noto Sans CJK JP"/>
+                <a:cs typeface="Noto Sans"/>
+              </a:rPr>
+              <a:t>  </a:t>
+            </a:r>
             <a:r>
               <a:rPr sz="810" b="0" lang="ja-JP" altLang="en-US">
                 <a:solidFill>
@@ -21076,7 +20645,7 @@
                 <a:ea typeface="Noto Sans CJK JP"/>
                 <a:cs typeface="Noto Sans"/>
               </a:rPr>
-              <a:t>日本語訳：主張と注釈根拠の全文</a:t>
+              <a:t>日本語訳：主張と根拠の全文</a:t>
             </a:r>
           </a:p>
         </p:txBody>
@@ -21181,7 +20750,7 @@
                 <a:ea typeface="Noto Sans CJK JP"/>
                 <a:cs typeface="Noto Sans"/>
               </a:rPr>
-              <a:t>注釈根拠：</a:t>
+              <a:t>根拠：</a:t>
             </a:r>
           </a:p>
           <a:p>
@@ -21328,7 +20897,7 @@
                 <a:ea typeface="Noto Sans CJK JP"/>
                 <a:cs typeface="Noto Sans"/>
               </a:rPr>
-              <a:t>配布ラベル：反証 / REF</a:t>
+              <a:t>正解：反証</a:t>
             </a:r>
           </a:p>
         </p:txBody>
@@ -21363,7 +20932,7 @@
                 <a:spcPts val="0"/>
               </a:spcBef>
               <a:spcAft>
-                <a:spcPts val="140"/>
+                <a:spcPts val="400"/>
               </a:spcAft>
               <a:buNone/>
               <a:defRPr sz="810" b="0">
@@ -21382,25 +20951,19 @@
                 <a:ea typeface="Noto Sans CJK JP"/>
                 <a:cs typeface="Noto Sans"/>
               </a:rPr>
-              <a:t>[1] THU-BPM. CHEF公式CHEF.tar.gz、train/dev/test原JSON。 dev row348 / claimId1201 / 根拠3文</a:t>
-            </a:r>
-          </a:p>
-          <a:p>
-            <a:pPr>
-              <a:lnSpc>
-                <a:spcPts val="940"/>
-              </a:lnSpc>
-              <a:spcAft>
-                <a:spcPts val="400"/>
-              </a:spcAft>
-              <a:buNone/>
-              <a:defRPr sz="810" b="0">
-                <a:solidFill>
-                  <a:srgbClr val="303437"/>
-                </a:solidFill>
-                <a:latin typeface="Noto Sans"/>
-              </a:defRPr>
-            </a:pPr>
+              <a:t>[1] THU-BPM. CHEF データセット。</a:t>
+            </a:r>
+            <a:r>
+              <a:rPr sz="810" b="0" lang="ja-JP" altLang="en-US">
+                <a:solidFill>
+                  <a:srgbClr val="626669"/>
+                </a:solidFill>
+                <a:latin typeface="Noto Sans"/>
+                <a:ea typeface="Noto Sans CJK JP"/>
+                <a:cs typeface="Noto Sans"/>
+              </a:rPr>
+              <a:t>  </a:t>
+            </a:r>
             <a:r>
               <a:rPr sz="810" b="0" lang="ja-JP" altLang="en-US">
                 <a:solidFill>
@@ -21579,7 +21142,7 @@
                 <a:ea typeface="Noto Sans CJK JP"/>
                 <a:cs typeface="Noto Sans"/>
               </a:rPr>
-              <a:t>中国語：主張と注釈根拠の全文 ／ 日本語訳</a:t>
+              <a:t>中国語：主張と根拠の全文 ／ 日本語訳</a:t>
             </a:r>
           </a:p>
         </p:txBody>
@@ -21820,7 +21383,7 @@
                 <a:ea typeface="Noto Sans CJK JP"/>
                 <a:cs typeface="Noto Sans"/>
               </a:rPr>
-              <a:t>注釈根拠：</a:t>
+              <a:t>根拠：</a:t>
             </a:r>
           </a:p>
           <a:p>
@@ -21905,7 +21468,7 @@
                 <a:ea typeface="Noto Sans CJK JP"/>
                 <a:cs typeface="Noto Sans"/>
               </a:rPr>
-              <a:t>配布ラベル：反証 / REF</a:t>
+              <a:t>正解：反証</a:t>
             </a:r>
           </a:p>
         </p:txBody>
@@ -21940,7 +21503,7 @@
                 <a:spcPts val="0"/>
               </a:spcBef>
               <a:spcAft>
-                <a:spcPts val="140"/>
+                <a:spcPts val="400"/>
               </a:spcAft>
               <a:buNone/>
               <a:defRPr sz="810" b="0">
@@ -21959,25 +21522,19 @@
                 <a:ea typeface="Noto Sans CJK JP"/>
                 <a:cs typeface="Noto Sans"/>
               </a:rPr>
-              <a:t>[1] THU-BPM. CHEF公式CHEF.tar.gz、train/dev/test原JSON。 test row343 / claimId1453 / 根拠1文</a:t>
-            </a:r>
-          </a:p>
-          <a:p>
-            <a:pPr>
-              <a:lnSpc>
-                <a:spcPts val="940"/>
-              </a:lnSpc>
-              <a:spcAft>
-                <a:spcPts val="400"/>
-              </a:spcAft>
-              <a:buNone/>
-              <a:defRPr sz="810" b="0">
-                <a:solidFill>
-                  <a:srgbClr val="303437"/>
-                </a:solidFill>
-                <a:latin typeface="Noto Sans"/>
-              </a:defRPr>
-            </a:pPr>
+              <a:t>[1] THU-BPM. CHEF データセット。</a:t>
+            </a:r>
+            <a:r>
+              <a:rPr sz="810" b="0" lang="ja-JP" altLang="en-US">
+                <a:solidFill>
+                  <a:srgbClr val="626669"/>
+                </a:solidFill>
+                <a:latin typeface="Noto Sans"/>
+                <a:ea typeface="Noto Sans CJK JP"/>
+                <a:cs typeface="Noto Sans"/>
+              </a:rPr>
+              <a:t>  </a:t>
+            </a:r>
             <a:r>
               <a:rPr sz="810" b="0" lang="ja-JP" altLang="en-US">
                 <a:solidFill>
@@ -22270,7 +21827,7 @@
                 <a:ea typeface="Noto Sans CJK JP"/>
                 <a:cs typeface="Noto Sans"/>
               </a:rPr>
-              <a:t>中国語：主張と注釈根拠の全文</a:t>
+              <a:t>中国語：主張と根拠の全文</a:t>
             </a:r>
           </a:p>
         </p:txBody>
@@ -22491,7 +22048,7 @@
                 <a:ea typeface="Noto Sans CJK JP"/>
                 <a:cs typeface="Noto Sans"/>
               </a:rPr>
-              <a:t>配布ラベル：情報不足 / NEI</a:t>
+              <a:t>正解：情報不足</a:t>
             </a:r>
           </a:p>
         </p:txBody>
@@ -22526,7 +22083,7 @@
                 <a:spcPts val="0"/>
               </a:spcBef>
               <a:spcAft>
-                <a:spcPts val="140"/>
+                <a:spcPts val="400"/>
               </a:spcAft>
               <a:buNone/>
               <a:defRPr sz="810" b="0">
@@ -22545,25 +22102,19 @@
                 <a:ea typeface="Noto Sans CJK JP"/>
                 <a:cs typeface="Noto Sans"/>
               </a:rPr>
-              <a:t>[1] THU-BPM. CHEF公式CHEF.tar.gz、train/dev/test原JSON。 dev row787 / claimId393 / 根拠2文</a:t>
-            </a:r>
-          </a:p>
-          <a:p>
-            <a:pPr>
-              <a:lnSpc>
-                <a:spcPts val="940"/>
-              </a:lnSpc>
-              <a:spcAft>
-                <a:spcPts val="400"/>
-              </a:spcAft>
-              <a:buNone/>
-              <a:defRPr sz="810" b="0">
-                <a:solidFill>
-                  <a:srgbClr val="303437"/>
-                </a:solidFill>
-                <a:latin typeface="Noto Sans"/>
-              </a:defRPr>
-            </a:pPr>
+              <a:t>[1] THU-BPM. CHEF データセット。</a:t>
+            </a:r>
+            <a:r>
+              <a:rPr sz="810" b="0" lang="ja-JP" altLang="en-US">
+                <a:solidFill>
+                  <a:srgbClr val="626669"/>
+                </a:solidFill>
+                <a:latin typeface="Noto Sans"/>
+                <a:ea typeface="Noto Sans CJK JP"/>
+                <a:cs typeface="Noto Sans"/>
+              </a:rPr>
+              <a:t>  </a:t>
+            </a:r>
             <a:r>
               <a:rPr sz="810" b="0" lang="ja-JP" altLang="en-US">
                 <a:solidFill>
@@ -22742,7 +22293,7 @@
                 <a:ea typeface="Noto Sans CJK JP"/>
                 <a:cs typeface="Noto Sans"/>
               </a:rPr>
-              <a:t>日本語訳：主張と注釈根拠の全文</a:t>
+              <a:t>日本語訳：主張と根拠の全文</a:t>
             </a:r>
           </a:p>
         </p:txBody>
@@ -22847,7 +22398,7 @@
                 <a:ea typeface="Noto Sans CJK JP"/>
                 <a:cs typeface="Noto Sans"/>
               </a:rPr>
-              <a:t>注釈根拠：</a:t>
+              <a:t>根拠：</a:t>
             </a:r>
           </a:p>
           <a:p>
@@ -22963,7 +22514,7 @@
                 <a:ea typeface="Noto Sans CJK JP"/>
                 <a:cs typeface="Noto Sans"/>
               </a:rPr>
-              <a:t>配布ラベル：情報不足 / NEI</a:t>
+              <a:t>正解：情報不足</a:t>
             </a:r>
           </a:p>
         </p:txBody>
@@ -22998,7 +22549,7 @@
                 <a:spcPts val="0"/>
               </a:spcBef>
               <a:spcAft>
-                <a:spcPts val="140"/>
+                <a:spcPts val="400"/>
               </a:spcAft>
               <a:buNone/>
               <a:defRPr sz="810" b="0">
@@ -23017,25 +22568,19 @@
                 <a:ea typeface="Noto Sans CJK JP"/>
                 <a:cs typeface="Noto Sans"/>
               </a:rPr>
-              <a:t>[1] THU-BPM. CHEF公式CHEF.tar.gz、train/dev/test原JSON。 dev row787 / claimId393 / 根拠2文</a:t>
-            </a:r>
-          </a:p>
-          <a:p>
-            <a:pPr>
-              <a:lnSpc>
-                <a:spcPts val="940"/>
-              </a:lnSpc>
-              <a:spcAft>
-                <a:spcPts val="400"/>
-              </a:spcAft>
-              <a:buNone/>
-              <a:defRPr sz="810" b="0">
-                <a:solidFill>
-                  <a:srgbClr val="303437"/>
-                </a:solidFill>
-                <a:latin typeface="Noto Sans"/>
-              </a:defRPr>
-            </a:pPr>
+              <a:t>[1] THU-BPM. CHEF データセット。</a:t>
+            </a:r>
+            <a:r>
+              <a:rPr sz="810" b="0" lang="ja-JP" altLang="en-US">
+                <a:solidFill>
+                  <a:srgbClr val="626669"/>
+                </a:solidFill>
+                <a:latin typeface="Noto Sans"/>
+                <a:ea typeface="Noto Sans CJK JP"/>
+                <a:cs typeface="Noto Sans"/>
+              </a:rPr>
+              <a:t>  </a:t>
+            </a:r>
             <a:r>
               <a:rPr sz="810" b="0" lang="ja-JP" altLang="en-US">
                 <a:solidFill>
@@ -23214,7 +22759,7 @@
                 <a:ea typeface="Noto Sans CJK JP"/>
                 <a:cs typeface="Noto Sans"/>
               </a:rPr>
-              <a:t>中国語：主張と注釈根拠の全文 ／ 日本語訳</a:t>
+              <a:t>中国語：主張と根拠の全文 ／ 日本語訳</a:t>
             </a:r>
           </a:p>
         </p:txBody>
@@ -23486,7 +23031,7 @@
                 <a:ea typeface="Noto Sans CJK JP"/>
                 <a:cs typeface="Noto Sans"/>
               </a:rPr>
-              <a:t>注釈根拠：</a:t>
+              <a:t>根拠：</a:t>
             </a:r>
           </a:p>
           <a:p>
@@ -23602,7 +23147,7 @@
                 <a:ea typeface="Noto Sans CJK JP"/>
                 <a:cs typeface="Noto Sans"/>
               </a:rPr>
-              <a:t>配布ラベル：反証 / REF</a:t>
+              <a:t>正解：反証</a:t>
             </a:r>
           </a:p>
         </p:txBody>
@@ -23637,7 +23182,7 @@
                 <a:spcPts val="0"/>
               </a:spcBef>
               <a:spcAft>
-                <a:spcPts val="140"/>
+                <a:spcPts val="400"/>
               </a:spcAft>
               <a:buNone/>
               <a:defRPr sz="810" b="0">
@@ -23656,25 +23201,19 @@
                 <a:ea typeface="Noto Sans CJK JP"/>
                 <a:cs typeface="Noto Sans"/>
               </a:rPr>
-              <a:t>[1] THU-BPM. CHEF公式CHEF.tar.gz、train/dev/test原JSON。 test row349 / claimId2501 / 根拠2文</a:t>
-            </a:r>
-          </a:p>
-          <a:p>
-            <a:pPr>
-              <a:lnSpc>
-                <a:spcPts val="940"/>
-              </a:lnSpc>
-              <a:spcAft>
-                <a:spcPts val="400"/>
-              </a:spcAft>
-              <a:buNone/>
-              <a:defRPr sz="810" b="0">
-                <a:solidFill>
-                  <a:srgbClr val="303437"/>
-                </a:solidFill>
-                <a:latin typeface="Noto Sans"/>
-              </a:defRPr>
-            </a:pPr>
+              <a:t>[1] THU-BPM. CHEF データセット。</a:t>
+            </a:r>
+            <a:r>
+              <a:rPr sz="810" b="0" lang="ja-JP" altLang="en-US">
+                <a:solidFill>
+                  <a:srgbClr val="626669"/>
+                </a:solidFill>
+                <a:latin typeface="Noto Sans"/>
+                <a:ea typeface="Noto Sans CJK JP"/>
+                <a:cs typeface="Noto Sans"/>
+              </a:rPr>
+              <a:t>  </a:t>
+            </a:r>
             <a:r>
               <a:rPr sz="810" b="0" lang="ja-JP" altLang="en-US">
                 <a:solidFill>
@@ -23853,7 +23392,7 @@
                 <a:ea typeface="Noto Sans CJK JP"/>
                 <a:cs typeface="Noto Sans"/>
               </a:rPr>
-              <a:t>中国語：主張と注釈根拠の全文 ／ 日本語訳</a:t>
+              <a:t>中国語：主張と根拠の全文 ／ 日本語訳</a:t>
             </a:r>
           </a:p>
         </p:txBody>
@@ -24094,7 +23633,7 @@
                 <a:ea typeface="Noto Sans CJK JP"/>
                 <a:cs typeface="Noto Sans"/>
               </a:rPr>
-              <a:t>主張：2020年11月30日、人民元の対米ドル為替基準値は27ベーシスポイント引き下げられた。</a:t>
+              <a:t>主張：2020年11月30日、人民元の対米ドル為替基準値は27ベーシスポイントの人民元安となった。</a:t>
             </a:r>
           </a:p>
           <a:p>
@@ -24125,7 +23664,7 @@
                 <a:ea typeface="Noto Sans CJK JP"/>
                 <a:cs typeface="Noto Sans"/>
               </a:rPr>
-              <a:t>注釈根拠：</a:t>
+              <a:t>根拠：</a:t>
             </a:r>
           </a:p>
           <a:p>
@@ -24156,7 +23695,7 @@
                 <a:ea typeface="Noto Sans CJK JP"/>
                 <a:cs typeface="Noto Sans"/>
               </a:rPr>
-              <a:t>1. 新華社上海11月30日電。中国外貨取引センターのデータによると、30日の人民元の対米ドル為替基準値は6.5782で、前営業日から27ベーシスポイント引き下げられた。</a:t>
+              <a:t>1. 新華社上海11月30日電。中国外貨取引センターのデータによると、30日の人民元の対米ドル為替基準値は6.5782で、前営業日から27ベーシスポイントの人民元安となった。</a:t>
             </a:r>
           </a:p>
           <a:p>
@@ -24241,7 +23780,7 @@
                 <a:ea typeface="Noto Sans CJK JP"/>
                 <a:cs typeface="Noto Sans"/>
               </a:rPr>
-              <a:t>配布ラベル：支持 / SUP</a:t>
+              <a:t>正解：支持</a:t>
             </a:r>
           </a:p>
         </p:txBody>
@@ -24276,7 +23815,7 @@
                 <a:spcPts val="0"/>
               </a:spcBef>
               <a:spcAft>
-                <a:spcPts val="140"/>
+                <a:spcPts val="400"/>
               </a:spcAft>
               <a:buNone/>
               <a:defRPr sz="810" b="0">
@@ -24295,25 +23834,19 @@
                 <a:ea typeface="Noto Sans CJK JP"/>
                 <a:cs typeface="Noto Sans"/>
               </a:rPr>
-              <a:t>[1] THU-BPM. CHEF公式CHEF.tar.gz、train/dev/test原JSON。 test row0 / claimId11633 / 根拠2文</a:t>
-            </a:r>
-          </a:p>
-          <a:p>
-            <a:pPr>
-              <a:lnSpc>
-                <a:spcPts val="940"/>
-              </a:lnSpc>
-              <a:spcAft>
-                <a:spcPts val="400"/>
-              </a:spcAft>
-              <a:buNone/>
-              <a:defRPr sz="810" b="0">
-                <a:solidFill>
-                  <a:srgbClr val="303437"/>
-                </a:solidFill>
-                <a:latin typeface="Noto Sans"/>
-              </a:defRPr>
-            </a:pPr>
+              <a:t>[1] THU-BPM. CHEF データセット。</a:t>
+            </a:r>
+            <a:r>
+              <a:rPr sz="810" b="0" lang="ja-JP" altLang="en-US">
+                <a:solidFill>
+                  <a:srgbClr val="626669"/>
+                </a:solidFill>
+                <a:latin typeface="Noto Sans"/>
+                <a:ea typeface="Noto Sans CJK JP"/>
+                <a:cs typeface="Noto Sans"/>
+              </a:rPr>
+              <a:t>  </a:t>
+            </a:r>
             <a:r>
               <a:rPr sz="810" b="0" lang="ja-JP" altLang="en-US">
                 <a:solidFill>
@@ -24492,7 +24025,7 @@
                 <a:ea typeface="Noto Sans CJK JP"/>
                 <a:cs typeface="Noto Sans"/>
               </a:rPr>
-              <a:t>中国語：主張と注釈根拠の全文</a:t>
+              <a:t>中国語：主張と根拠の全文</a:t>
             </a:r>
           </a:p>
         </p:txBody>
@@ -24744,7 +24277,7 @@
                 <a:ea typeface="Noto Sans CJK JP"/>
                 <a:cs typeface="Noto Sans"/>
               </a:rPr>
-              <a:t>配布ラベル：支持 / SUP</a:t>
+              <a:t>正解：支持</a:t>
             </a:r>
           </a:p>
         </p:txBody>
@@ -24779,7 +24312,7 @@
                 <a:spcPts val="0"/>
               </a:spcBef>
               <a:spcAft>
-                <a:spcPts val="140"/>
+                <a:spcPts val="400"/>
               </a:spcAft>
               <a:buNone/>
               <a:defRPr sz="810" b="0">
@@ -24798,25 +24331,19 @@
                 <a:ea typeface="Noto Sans CJK JP"/>
                 <a:cs typeface="Noto Sans"/>
               </a:rPr>
-              <a:t>[1] THU-BPM. CHEF公式CHEF.tar.gz、train/dev/test原JSON。 test row16 / claimId9778 / 根拠3文</a:t>
-            </a:r>
-          </a:p>
-          <a:p>
-            <a:pPr>
-              <a:lnSpc>
-                <a:spcPts val="940"/>
-              </a:lnSpc>
-              <a:spcAft>
-                <a:spcPts val="400"/>
-              </a:spcAft>
-              <a:buNone/>
-              <a:defRPr sz="810" b="0">
-                <a:solidFill>
-                  <a:srgbClr val="303437"/>
-                </a:solidFill>
-                <a:latin typeface="Noto Sans"/>
-              </a:defRPr>
-            </a:pPr>
+              <a:t>[1] THU-BPM. CHEF データセット。</a:t>
+            </a:r>
+            <a:r>
+              <a:rPr sz="810" b="0" lang="ja-JP" altLang="en-US">
+                <a:solidFill>
+                  <a:srgbClr val="626669"/>
+                </a:solidFill>
+                <a:latin typeface="Noto Sans"/>
+                <a:ea typeface="Noto Sans CJK JP"/>
+                <a:cs typeface="Noto Sans"/>
+              </a:rPr>
+              <a:t>  </a:t>
+            </a:r>
             <a:r>
               <a:rPr sz="810" b="0" lang="ja-JP" altLang="en-US">
                 <a:solidFill>
@@ -24995,7 +24522,7 @@
                 <a:ea typeface="Noto Sans CJK JP"/>
                 <a:cs typeface="Noto Sans"/>
               </a:rPr>
-              <a:t>日本語訳：主張と注釈根拠の全文</a:t>
+              <a:t>日本語訳：主張と根拠の全文</a:t>
             </a:r>
           </a:p>
         </p:txBody>
@@ -25100,7 +24627,7 @@
                 <a:ea typeface="Noto Sans CJK JP"/>
                 <a:cs typeface="Noto Sans"/>
               </a:rPr>
-              <a:t>注釈根拠：</a:t>
+              <a:t>根拠：</a:t>
             </a:r>
           </a:p>
           <a:p>
@@ -25247,7 +24774,7 @@
                 <a:ea typeface="Noto Sans CJK JP"/>
                 <a:cs typeface="Noto Sans"/>
               </a:rPr>
-              <a:t>配布ラベル：支持 / SUP</a:t>
+              <a:t>正解：支持</a:t>
             </a:r>
           </a:p>
         </p:txBody>
@@ -25282,7 +24809,7 @@
                 <a:spcPts val="0"/>
               </a:spcBef>
               <a:spcAft>
-                <a:spcPts val="140"/>
+                <a:spcPts val="400"/>
               </a:spcAft>
               <a:buNone/>
               <a:defRPr sz="810" b="0">
@@ -25301,25 +24828,19 @@
                 <a:ea typeface="Noto Sans CJK JP"/>
                 <a:cs typeface="Noto Sans"/>
               </a:rPr>
-              <a:t>[1] THU-BPM. CHEF公式CHEF.tar.gz、train/dev/test原JSON。 test row16 / claimId9778 / 根拠3文</a:t>
-            </a:r>
-          </a:p>
-          <a:p>
-            <a:pPr>
-              <a:lnSpc>
-                <a:spcPts val="940"/>
-              </a:lnSpc>
-              <a:spcAft>
-                <a:spcPts val="400"/>
-              </a:spcAft>
-              <a:buNone/>
-              <a:defRPr sz="810" b="0">
-                <a:solidFill>
-                  <a:srgbClr val="303437"/>
-                </a:solidFill>
-                <a:latin typeface="Noto Sans"/>
-              </a:defRPr>
-            </a:pPr>
+              <a:t>[1] THU-BPM. CHEF データセット。</a:t>
+            </a:r>
+            <a:r>
+              <a:rPr sz="810" b="0" lang="ja-JP" altLang="en-US">
+                <a:solidFill>
+                  <a:srgbClr val="626669"/>
+                </a:solidFill>
+                <a:latin typeface="Noto Sans"/>
+                <a:ea typeface="Noto Sans CJK JP"/>
+                <a:cs typeface="Noto Sans"/>
+              </a:rPr>
+              <a:t>  </a:t>
+            </a:r>
             <a:r>
               <a:rPr sz="810" b="0" lang="ja-JP" altLang="en-US">
                 <a:solidFill>
@@ -25498,7 +25019,7 @@
                 <a:ea typeface="Noto Sans CJK JP"/>
                 <a:cs typeface="Noto Sans"/>
               </a:rPr>
-              <a:t>中国語：主張と注釈根拠の全文</a:t>
+              <a:t>中国語：主張と根拠の全文</a:t>
             </a:r>
           </a:p>
         </p:txBody>
@@ -25719,7 +25240,7 @@
                 <a:ea typeface="Noto Sans CJK JP"/>
                 <a:cs typeface="Noto Sans"/>
               </a:rPr>
-              <a:t>配布ラベル：情報不足 / NEI</a:t>
+              <a:t>正解：情報不足</a:t>
             </a:r>
           </a:p>
         </p:txBody>
@@ -25754,7 +25275,7 @@
                 <a:spcPts val="0"/>
               </a:spcBef>
               <a:spcAft>
-                <a:spcPts val="140"/>
+                <a:spcPts val="400"/>
               </a:spcAft>
               <a:buNone/>
               <a:defRPr sz="810" b="0">
@@ -25773,25 +25294,19 @@
                 <a:ea typeface="Noto Sans CJK JP"/>
                 <a:cs typeface="Noto Sans"/>
               </a:rPr>
-              <a:t>[1] THU-BPM. CHEF公式CHEF.tar.gz、train/dev/test原JSON。 train row7253 / claimId301 / 根拠2文</a:t>
-            </a:r>
-          </a:p>
-          <a:p>
-            <a:pPr>
-              <a:lnSpc>
-                <a:spcPts val="940"/>
-              </a:lnSpc>
-              <a:spcAft>
-                <a:spcPts val="400"/>
-              </a:spcAft>
-              <a:buNone/>
-              <a:defRPr sz="810" b="0">
-                <a:solidFill>
-                  <a:srgbClr val="303437"/>
-                </a:solidFill>
-                <a:latin typeface="Noto Sans"/>
-              </a:defRPr>
-            </a:pPr>
+              <a:t>[1] THU-BPM. CHEF データセット。</a:t>
+            </a:r>
+            <a:r>
+              <a:rPr sz="810" b="0" lang="ja-JP" altLang="en-US">
+                <a:solidFill>
+                  <a:srgbClr val="626669"/>
+                </a:solidFill>
+                <a:latin typeface="Noto Sans"/>
+                <a:ea typeface="Noto Sans CJK JP"/>
+                <a:cs typeface="Noto Sans"/>
+              </a:rPr>
+              <a:t>  </a:t>
+            </a:r>
             <a:r>
               <a:rPr sz="810" b="0" lang="ja-JP" altLang="en-US">
                 <a:solidFill>
@@ -25970,7 +25485,7 @@
                 <a:ea typeface="Noto Sans CJK JP"/>
                 <a:cs typeface="Noto Sans"/>
               </a:rPr>
-              <a:t>日本語訳：主張と注釈根拠の全文</a:t>
+              <a:t>日本語訳：主張と根拠の全文</a:t>
             </a:r>
           </a:p>
         </p:txBody>
@@ -26075,7 +25590,7 @@
                 <a:ea typeface="Noto Sans CJK JP"/>
                 <a:cs typeface="Noto Sans"/>
               </a:rPr>
-              <a:t>注釈根拠：</a:t>
+              <a:t>根拠：</a:t>
             </a:r>
           </a:p>
           <a:p>
@@ -26191,7 +25706,7 @@
                 <a:ea typeface="Noto Sans CJK JP"/>
                 <a:cs typeface="Noto Sans"/>
               </a:rPr>
-              <a:t>配布ラベル：情報不足 / NEI</a:t>
+              <a:t>正解：情報不足</a:t>
             </a:r>
           </a:p>
         </p:txBody>
@@ -26226,7 +25741,7 @@
                 <a:spcPts val="0"/>
               </a:spcBef>
               <a:spcAft>
-                <a:spcPts val="140"/>
+                <a:spcPts val="400"/>
               </a:spcAft>
               <a:buNone/>
               <a:defRPr sz="810" b="0">
@@ -26245,25 +25760,19 @@
                 <a:ea typeface="Noto Sans CJK JP"/>
                 <a:cs typeface="Noto Sans"/>
               </a:rPr>
-              <a:t>[1] THU-BPM. CHEF公式CHEF.tar.gz、train/dev/test原JSON。 train row7253 / claimId301 / 根拠2文</a:t>
-            </a:r>
-          </a:p>
-          <a:p>
-            <a:pPr>
-              <a:lnSpc>
-                <a:spcPts val="940"/>
-              </a:lnSpc>
-              <a:spcAft>
-                <a:spcPts val="400"/>
-              </a:spcAft>
-              <a:buNone/>
-              <a:defRPr sz="810" b="0">
-                <a:solidFill>
-                  <a:srgbClr val="303437"/>
-                </a:solidFill>
-                <a:latin typeface="Noto Sans"/>
-              </a:defRPr>
-            </a:pPr>
+              <a:t>[1] THU-BPM. CHEF データセット。</a:t>
+            </a:r>
+            <a:r>
+              <a:rPr sz="810" b="0" lang="ja-JP" altLang="en-US">
+                <a:solidFill>
+                  <a:srgbClr val="626669"/>
+                </a:solidFill>
+                <a:latin typeface="Noto Sans"/>
+                <a:ea typeface="Noto Sans CJK JP"/>
+                <a:cs typeface="Noto Sans"/>
+              </a:rPr>
+              <a:t>  </a:t>
+            </a:r>
             <a:r>
               <a:rPr sz="810" b="0" lang="ja-JP" altLang="en-US">
                 <a:solidFill>
@@ -26442,7 +25951,7 @@
                 <a:ea typeface="Noto Sans CJK JP"/>
                 <a:cs typeface="Noto Sans"/>
               </a:rPr>
-              <a:t>中国語：主張と注釈根拠の全文 ／ 日本語訳</a:t>
+              <a:t>中国語：主張と根拠の全文 ／ 日本語訳</a:t>
             </a:r>
           </a:p>
         </p:txBody>
@@ -26745,7 +26254,7 @@
                 <a:ea typeface="Noto Sans CJK JP"/>
                 <a:cs typeface="Noto Sans"/>
               </a:rPr>
-              <a:t>注釈根拠：</a:t>
+              <a:t>根拠：</a:t>
             </a:r>
           </a:p>
           <a:p>
@@ -26892,7 +26401,7 @@
                 <a:ea typeface="Noto Sans CJK JP"/>
                 <a:cs typeface="Noto Sans"/>
               </a:rPr>
-              <a:t>配布ラベル：支持 / SUP</a:t>
+              <a:t>正解：支持</a:t>
             </a:r>
           </a:p>
         </p:txBody>
@@ -26927,7 +26436,7 @@
                 <a:spcPts val="0"/>
               </a:spcBef>
               <a:spcAft>
-                <a:spcPts val="140"/>
+                <a:spcPts val="400"/>
               </a:spcAft>
               <a:buNone/>
               <a:defRPr sz="810" b="0">
@@ -26946,25 +26455,19 @@
                 <a:ea typeface="Noto Sans CJK JP"/>
                 <a:cs typeface="Noto Sans"/>
               </a:rPr>
-              <a:t>[1] THU-BPM. CHEF公式CHEF.tar.gz、train/dev/test原JSON。 train row41 / claimId323 / 根拠3文</a:t>
-            </a:r>
-          </a:p>
-          <a:p>
-            <a:pPr>
-              <a:lnSpc>
-                <a:spcPts val="940"/>
-              </a:lnSpc>
-              <a:spcAft>
-                <a:spcPts val="400"/>
-              </a:spcAft>
-              <a:buNone/>
-              <a:defRPr sz="810" b="0">
-                <a:solidFill>
-                  <a:srgbClr val="303437"/>
-                </a:solidFill>
-                <a:latin typeface="Noto Sans"/>
-              </a:defRPr>
-            </a:pPr>
+              <a:t>[1] THU-BPM. CHEF データセット。</a:t>
+            </a:r>
+            <a:r>
+              <a:rPr sz="810" b="0" lang="ja-JP" altLang="en-US">
+                <a:solidFill>
+                  <a:srgbClr val="626669"/>
+                </a:solidFill>
+                <a:latin typeface="Noto Sans"/>
+                <a:ea typeface="Noto Sans CJK JP"/>
+                <a:cs typeface="Noto Sans"/>
+              </a:rPr>
+              <a:t>  </a:t>
+            </a:r>
             <a:r>
               <a:rPr sz="810" b="0" lang="ja-JP" altLang="en-US">
                 <a:solidFill>
@@ -27041,7 +26544,7 @@
                 <a:ea typeface="Noto Sans CJK JP"/>
                 <a:cs typeface="Noto Sans"/>
               </a:rPr>
-              <a:t>配布・注釈・評価の補足</a:t>
+              <a:t>根拠データの特徴と評価結果</a:t>
             </a:r>
           </a:p>
         </p:txBody>
@@ -27089,7 +26592,7 @@
                 <a:ea typeface="Noto Sans CJK JP"/>
                 <a:cs typeface="Noto Sans"/>
               </a:rPr>
-              <a:t>Appendix: 2. 配布・注釈・評価の補足</a:t>
+              <a:t>Appendix: 2. 根拠データの特徴と評価結果</a:t>
             </a:r>
           </a:p>
         </p:txBody>
@@ -27238,7 +26741,7 @@
                 <a:ea typeface="Noto Sans CJK JP"/>
                 <a:cs typeface="Noto Sans"/>
               </a:rPr>
-              <a:t>主張だけを分類する設計に加え、関連文書から根拠を選び、その根拠を使って判断する課題を扱う。配布レコードは検索文書欄と、最大5文の注釈根拠欄を持つ。</a:t>
+              <a:t>関連文書から根拠を選び、その根拠を使って主張の真偽を判断する。各レコードは検索文書と、最大5文の人が選んだ根拠を持つ。実例では、主張とこの根拠を全文で示す。</a:t>
             </a:r>
           </a:p>
         </p:txBody>
@@ -27340,7 +26843,7 @@
                 <a:ea typeface="Noto Sans CJK JP"/>
                 <a:cs typeface="Noto Sans"/>
               </a:rPr>
-              <a:t>[1] Hu, Guo, Wu, Liu, Wen and Yu (2022). CHEF. NAACL-HLT, pp3362–3376.</a:t>
+              <a:t>[1] Hu et al. (2022). CHEF. NAACL-HLT.</a:t>
             </a:r>
             <a:r>
               <a:rPr sz="810" b="0" lang="ja-JP" altLang="en-US">
@@ -27429,7 +26932,7 @@
                 <a:ea typeface="Noto Sans CJK JP"/>
                 <a:cs typeface="Noto Sans"/>
               </a:rPr>
-              <a:t>配布の注釈根拠には空欄もある</a:t>
+              <a:t>人が選んだ根拠がある主張は7,842件</a:t>
             </a:r>
           </a:p>
         </p:txBody>
@@ -27477,7 +26980,7 @@
                 <a:ea typeface="Noto Sans CJK JP"/>
                 <a:cs typeface="Noto Sans"/>
               </a:rPr>
-              <a:t>Appendix: 2. 配布・注釈・評価の補足</a:t>
+              <a:t>Appendix: 2. 根拠データの特徴と評価結果</a:t>
             </a:r>
           </a:p>
         </p:txBody>
@@ -27590,7 +27093,7 @@
                           <a:ea typeface="Noto Sans CJK JP"/>
                           <a:cs typeface="Noto Sans"/>
                         </a:rPr>
-                        <a:t>train</a:t>
+                        <a:t>学習</a:t>
                       </a:r>
                     </a:p>
                   </a:txBody>
@@ -27646,7 +27149,7 @@
                           <a:ea typeface="Noto Sans CJK JP"/>
                           <a:cs typeface="Noto Sans"/>
                         </a:rPr>
-                        <a:t>dev</a:t>
+                        <a:t>開発</a:t>
                       </a:r>
                     </a:p>
                   </a:txBody>
@@ -27702,7 +27205,7 @@
                           <a:ea typeface="Noto Sans CJK JP"/>
                           <a:cs typeface="Noto Sans"/>
                         </a:rPr>
-                        <a:t>test</a:t>
+                        <a:t>テスト</a:t>
                       </a:r>
                     </a:p>
                   </a:txBody>
@@ -27816,7 +27319,7 @@
                           <a:ea typeface="Noto Sans CJK JP"/>
                           <a:cs typeface="Noto Sans"/>
                         </a:rPr>
-                        <a:t>非空goldが0文</a:t>
+                        <a:t>根拠が空の主張</a:t>
                       </a:r>
                     </a:p>
                   </a:txBody>
@@ -28083,7 +27586,7 @@
                           <a:ea typeface="Noto Sans CJK JP"/>
                           <a:cs typeface="Noto Sans"/>
                         </a:rPr>
-                        <a:t>非空goldの文数</a:t>
+                        <a:t>人が選んだ根拠文</a:t>
                       </a:r>
                     </a:p>
                   </a:txBody>
@@ -28335,7 +27838,7 @@
                           <a:ea typeface="Noto Sans CJK JP"/>
                           <a:cs typeface="Noto Sans"/>
                         </a:rPr>
-                        <a:t>非空の検索文書</a:t>
+                        <a:t>検索文書</a:t>
                       </a:r>
                     </a:p>
                   </a:txBody>
@@ -28626,7 +28129,7 @@
                 <a:ea typeface="Noto Sans CJK JP"/>
                 <a:cs typeface="Noto Sans"/>
               </a:rPr>
-              <a:t>5枠×10,000行の検索文書欄は50,000枠。空欄は除いて集計。空のgoldとNEIは同義ではない。</a:t>
+              <a:t>根拠が空の2,158件にも、支持394件・反証897件・情報不足867件のラベルが付く。根拠を入力に使う場合は、この欠測を考慮する。</a:t>
             </a:r>
           </a:p>
         </p:txBody>
@@ -28680,1935 +28183,7 @@
                 <a:ea typeface="Noto Sans CJK JP"/>
                 <a:cs typeface="Noto Sans"/>
               </a:rPr>
-              <a:t>[1] THU-BPM. CHEF公式CHEF.tar.gz、train/dev/test原JSON。</a:t>
-            </a:r>
-            <a:r>
-              <a:rPr sz="810" b="0" lang="ja-JP" altLang="en-US">
-                <a:solidFill>
-                  <a:srgbClr val="626669"/>
-                </a:solidFill>
-                <a:latin typeface="Noto Sans"/>
-                <a:ea typeface="Noto Sans CJK JP"/>
-                <a:cs typeface="Noto Sans"/>
-              </a:rPr>
-              <a:t>  </a:t>
-            </a:r>
-            <a:r>
-              <a:rPr sz="810" b="0" lang="ja-JP" altLang="en-US">
-                <a:solidFill>
-                  <a:srgbClr val="626669"/>
-                </a:solidFill>
-                <a:latin typeface="Noto Sans"/>
-                <a:ea typeface="Noto Sans CJK JP"/>
-                <a:cs typeface="Noto Sans"/>
-                <a:hlinkClick r:id="rId2"/>
-              </a:rPr>
-              <a:t>https://drive.google.com/file/d/1QKe9i-yXDKh87p4ukRFSnzE03-hAzMto/view</a:t>
-            </a:r>
-          </a:p>
-        </p:txBody>
-      </p:sp>
-    </p:spTree>
-  </p:cSld>
-  <p:clrMapOvr>
-    <a:masterClrMapping/>
-  </p:clrMapOvr>
-</p:sld>
-</file>
-
-<file path=ppt/slides/slide51.xml><?xml version="1.0" encoding="utf-8"?>
-<p:sld xmlns:a="http://schemas.openxmlformats.org/drawingml/2006/main" xmlns:p="http://schemas.openxmlformats.org/presentationml/2006/main" xmlns:r="http://schemas.openxmlformats.org/officeDocument/2006/relationships">
-  <p:cSld>
-    <p:spTree>
-      <p:nvGrpSpPr>
-        <p:cNvPr id="1" name=""/>
-        <p:cNvGrpSpPr/>
-        <p:nvPr/>
-      </p:nvGrpSpPr>
-      <p:grpSpPr/>
-      <p:sp>
-        <p:nvSpPr>
-          <p:cNvPr id="2" name="Title 1"/>
-          <p:cNvSpPr>
-            <a:spLocks noGrp="1"/>
-          </p:cNvSpPr>
-          <p:nvPr>
-            <p:ph type="title"/>
-          </p:nvPr>
-        </p:nvSpPr>
-        <p:spPr>
-          <a:xfrm>
-            <a:off x="468172" y="650138"/>
-            <a:ext cx="8206740" cy="616305"/>
-          </a:xfrm>
-        </p:spPr>
-        <p:txBody>
-          <a:bodyPr wrap="square" lIns="0" rIns="0" tIns="0" bIns="0">
-            <a:noAutofit/>
-          </a:bodyPr>
-          <a:lstStyle/>
-          <a:p>
-            <a:pPr algn="l">
-              <a:lnSpc>
-                <a:spcPct val="110000"/>
-              </a:lnSpc>
-              <a:buNone/>
-              <a:defRPr sz="2800" b="0">
-                <a:solidFill>
-                  <a:srgbClr val="303437"/>
-                </a:solidFill>
-                <a:latin typeface="Noto Sans"/>
-              </a:defRPr>
-            </a:pPr>
-            <a:r>
-              <a:rPr sz="2800" b="1" lang="ja-JP" altLang="en-US">
-                <a:solidFill>
-                  <a:srgbClr val="303437"/>
-                </a:solidFill>
-                <a:latin typeface="Noto Sans"/>
-                <a:ea typeface="Noto Sans CJK JP"/>
-                <a:cs typeface="Noto Sans"/>
-              </a:rPr>
-              <a:t>空欄の件数と、構築時の除外は別に数える</a:t>
-            </a:r>
-          </a:p>
-        </p:txBody>
-      </p:sp>
-      <p:sp>
-        <p:nvSpPr>
-          <p:cNvPr id="3" name="Text Placeholder 2"/>
-          <p:cNvSpPr>
-            <a:spLocks noGrp="1"/>
-          </p:cNvSpPr>
-          <p:nvPr>
-            <p:ph type="body" idx="1"/>
-          </p:nvPr>
-        </p:nvSpPr>
-        <p:spPr>
-          <a:xfrm>
-            <a:off x="594360" y="1463040"/>
-            <a:ext cx="7955279" cy="3044952"/>
-          </a:xfrm>
-        </p:spPr>
-        <p:txBody>
-          <a:bodyPr wrap="square" tIns="91440" bIns="91440">
-            <a:noAutofit/>
-          </a:bodyPr>
-          <a:lstStyle/>
-          <a:p>
-            <a:pPr marL="457200" indent="-355600">
-              <a:lnSpc>
-                <a:spcPts val="2379"/>
-              </a:lnSpc>
-              <a:spcAft>
-                <a:spcPts val="700"/>
-              </a:spcAft>
-              <a:buSzPct val="66500"/>
-              <a:buFont typeface="Noto Sans CJK JP"/>
-              <a:buChar char="●"/>
-              <a:defRPr sz="2000" b="0">
-                <a:solidFill>
-                  <a:srgbClr val="303437"/>
-                </a:solidFill>
-                <a:latin typeface="Noto Sans"/>
-              </a:defRPr>
-            </a:pPr>
-            <a:r>
-              <a:rPr sz="2000" b="0" lang="ja-JP" altLang="en-US">
-                <a:solidFill>
-                  <a:srgbClr val="303437"/>
-                </a:solidFill>
-                <a:latin typeface="Noto Sans"/>
-                <a:ea typeface="Noto Sans CJK JP"/>
-                <a:cs typeface="Noto Sans"/>
-              </a:rPr>
-              <a:t>原配布でgoldが全て空の2,158行は、支持394・反証897・情報不足867件だった。情報不足だけに現れる欠測ではない。</a:t>
-            </a:r>
-          </a:p>
-          <a:p>
-            <a:pPr marL="457200" indent="-355600">
-              <a:lnSpc>
-                <a:spcPts val="2379"/>
-              </a:lnSpc>
-              <a:spcAft>
-                <a:spcPts val="700"/>
-              </a:spcAft>
-              <a:buSzPct val="66500"/>
-              <a:buFont typeface="Noto Sans CJK JP"/>
-              <a:buChar char="●"/>
-              <a:defRPr sz="2000" b="0">
-                <a:solidFill>
-                  <a:srgbClr val="303437"/>
-                </a:solidFill>
-                <a:latin typeface="Noto Sans"/>
-              </a:defRPr>
-            </a:pPr>
-            <a:r>
-              <a:rPr sz="2000" b="0" lang="ja-JP" altLang="en-US">
-                <a:solidFill>
-                  <a:srgbClr val="303437"/>
-                </a:solidFill>
-                <a:latin typeface="Noto Sans"/>
-                <a:ea typeface="Noto Sans CJK JP"/>
-                <a:cs typeface="Noto Sans"/>
-              </a:rPr>
-              <a:t>構築時の説明では、関連根拠がなかった5.6％の候補を棄却したとされる。現在の配布空欄を、その除外済み候補の件数に読み替えない。</a:t>
-            </a:r>
-          </a:p>
-          <a:p>
-            <a:pPr marL="457200" indent="-355600">
-              <a:lnSpc>
-                <a:spcPts val="2379"/>
-              </a:lnSpc>
-              <a:spcAft>
-                <a:spcPts val="0"/>
-              </a:spcAft>
-              <a:buSzPct val="66500"/>
-              <a:buFont typeface="Noto Sans CJK JP"/>
-              <a:buChar char="●"/>
-              <a:defRPr sz="2000" b="0">
-                <a:solidFill>
-                  <a:srgbClr val="303437"/>
-                </a:solidFill>
-                <a:latin typeface="Noto Sans"/>
-              </a:defRPr>
-            </a:pPr>
-            <a:r>
-              <a:rPr sz="2000" b="0" lang="ja-JP" altLang="en-US">
-                <a:solidFill>
-                  <a:srgbClr val="303437"/>
-                </a:solidFill>
-                <a:latin typeface="Noto Sans"/>
-                <a:ea typeface="Noto Sans CJK JP"/>
-                <a:cs typeface="Noto Sans"/>
-              </a:rPr>
-              <a:t>本資料の13例は非空goldのある独立した行を選び、各行の非空文を全て掲載した。検索文書全体は原票に保持し、スライドでは注釈根拠の範囲を示す。</a:t>
-            </a:r>
-          </a:p>
-        </p:txBody>
-      </p:sp>
-      <p:sp>
-        <p:nvSpPr>
-          <p:cNvPr id="4" name="Title 3"/>
-          <p:cNvSpPr>
-            <a:spLocks noGrp="1"/>
-          </p:cNvSpPr>
-          <p:nvPr>
-            <p:ph type="title" idx="2"/>
-          </p:nvPr>
-        </p:nvSpPr>
-        <p:spPr>
-          <a:xfrm>
-            <a:off x="75895" y="0"/>
-            <a:ext cx="8115300" cy="480060"/>
-          </a:xfrm>
-        </p:spPr>
-        <p:txBody>
-          <a:bodyPr wrap="square" lIns="0" rIns="0" tIns="0" bIns="0" anchor="ctr">
-            <a:noAutofit/>
-          </a:bodyPr>
-          <a:lstStyle/>
-          <a:p>
-            <a:pPr algn="l">
-              <a:lnSpc>
-                <a:spcPct val="110000"/>
-              </a:lnSpc>
-              <a:buNone/>
-              <a:defRPr sz="1400" b="0">
-                <a:solidFill>
-                  <a:srgbClr val="303437"/>
-                </a:solidFill>
-                <a:latin typeface="Noto Sans"/>
-              </a:defRPr>
-            </a:pPr>
-            <a:r>
-              <a:rPr sz="1400" b="1" lang="ja-JP" altLang="en-US">
-                <a:solidFill>
-                  <a:srgbClr val="FFFEF8"/>
-                </a:solidFill>
-                <a:latin typeface="Noto Sans"/>
-                <a:ea typeface="Noto Sans CJK JP"/>
-                <a:cs typeface="Noto Sans"/>
-              </a:rPr>
-              <a:t>Appendix: 2. 配布・注釈・評価の補足</a:t>
-            </a:r>
-          </a:p>
-        </p:txBody>
-      </p:sp>
-      <p:sp>
-        <p:nvSpPr>
-          <p:cNvPr id="5" name="sources"/>
-          <p:cNvSpPr txBox="1"/>
-          <p:nvPr/>
-        </p:nvSpPr>
-        <p:spPr>
-          <a:xfrm>
-            <a:off x="502920" y="4700016"/>
-            <a:ext cx="8183879" cy="530352"/>
-          </a:xfrm>
-          <a:prstGeom prst="rect">
-            <a:avLst/>
-          </a:prstGeom>
-          <a:noFill/>
-        </p:spPr>
-        <p:txBody>
-          <a:bodyPr wrap="square" lIns="0" rIns="0" tIns="0" bIns="0">
-            <a:noAutofit/>
-          </a:bodyPr>
-          <a:lstStyle/>
-          <a:p>
-            <a:pPr algn="l">
-              <a:lnSpc>
-                <a:spcPts val="940"/>
-              </a:lnSpc>
-              <a:spcBef>
-                <a:spcPts val="0"/>
-              </a:spcBef>
-              <a:spcAft>
-                <a:spcPts val="400"/>
-              </a:spcAft>
-              <a:buNone/>
-              <a:defRPr sz="810" b="0">
-                <a:solidFill>
-                  <a:srgbClr val="303437"/>
-                </a:solidFill>
-                <a:latin typeface="Noto Sans"/>
-              </a:defRPr>
-            </a:pPr>
-            <a:r>
-              <a:rPr sz="810" b="0" lang="ja-JP" altLang="en-US">
-                <a:solidFill>
-                  <a:srgbClr val="626669"/>
-                </a:solidFill>
-                <a:latin typeface="Noto Sans"/>
-                <a:ea typeface="Noto Sans CJK JP"/>
-                <a:cs typeface="Noto Sans"/>
-              </a:rPr>
-              <a:t>[1] Hu, Guo, Wu, Liu, Wen and Yu (2022). CHEF. NAACL-HLT, pp3362–3376.</a:t>
-            </a:r>
-            <a:r>
-              <a:rPr sz="810" b="0" lang="ja-JP" altLang="en-US">
-                <a:solidFill>
-                  <a:srgbClr val="626669"/>
-                </a:solidFill>
-                <a:latin typeface="Noto Sans"/>
-                <a:ea typeface="Noto Sans CJK JP"/>
-                <a:cs typeface="Noto Sans"/>
-              </a:rPr>
-              <a:t>  </a:t>
-            </a:r>
-            <a:r>
-              <a:rPr sz="810" b="0" lang="ja-JP" altLang="en-US">
-                <a:solidFill>
-                  <a:srgbClr val="626669"/>
-                </a:solidFill>
-                <a:latin typeface="Noto Sans"/>
-                <a:ea typeface="Noto Sans CJK JP"/>
-                <a:cs typeface="Noto Sans"/>
-                <a:hlinkClick r:id="rId2"/>
-              </a:rPr>
-              <a:t>https://aclanthology.org/2022.naacl-main.246/</a:t>
-            </a:r>
-          </a:p>
-          <a:p>
-            <a:pPr>
-              <a:lnSpc>
-                <a:spcPts val="940"/>
-              </a:lnSpc>
-              <a:spcAft>
-                <a:spcPts val="400"/>
-              </a:spcAft>
-              <a:buNone/>
-              <a:defRPr sz="810" b="0">
-                <a:solidFill>
-                  <a:srgbClr val="303437"/>
-                </a:solidFill>
-                <a:latin typeface="Noto Sans"/>
-              </a:defRPr>
-            </a:pPr>
-            <a:r>
-              <a:rPr sz="810" b="0" lang="ja-JP" altLang="en-US">
-                <a:solidFill>
-                  <a:srgbClr val="626669"/>
-                </a:solidFill>
-                <a:latin typeface="Noto Sans"/>
-                <a:ea typeface="Noto Sans CJK JP"/>
-                <a:cs typeface="Noto Sans"/>
-              </a:rPr>
-              <a:t>[2] THU-BPM. CHEF公式CHEF.tar.gz、train/dev/test原JSON。</a:t>
-            </a:r>
-            <a:r>
-              <a:rPr sz="810" b="0" lang="ja-JP" altLang="en-US">
-                <a:solidFill>
-                  <a:srgbClr val="626669"/>
-                </a:solidFill>
-                <a:latin typeface="Noto Sans"/>
-                <a:ea typeface="Noto Sans CJK JP"/>
-                <a:cs typeface="Noto Sans"/>
-              </a:rPr>
-              <a:t>  </a:t>
-            </a:r>
-            <a:r>
-              <a:rPr sz="810" b="0" lang="ja-JP" altLang="en-US">
-                <a:solidFill>
-                  <a:srgbClr val="626669"/>
-                </a:solidFill>
-                <a:latin typeface="Noto Sans"/>
-                <a:ea typeface="Noto Sans CJK JP"/>
-                <a:cs typeface="Noto Sans"/>
-                <a:hlinkClick r:id="rId3"/>
-              </a:rPr>
-              <a:t>https://drive.google.com/file/d/1QKe9i-yXDKh87p4ukRFSnzE03-hAzMto/view</a:t>
-            </a:r>
-          </a:p>
-        </p:txBody>
-      </p:sp>
-    </p:spTree>
-  </p:cSld>
-  <p:clrMapOvr>
-    <a:masterClrMapping/>
-  </p:clrMapOvr>
-</p:sld>
-</file>
-
-<file path=ppt/slides/slide52.xml><?xml version="1.0" encoding="utf-8"?>
-<p:sld xmlns:a="http://schemas.openxmlformats.org/drawingml/2006/main" xmlns:p="http://schemas.openxmlformats.org/presentationml/2006/main" xmlns:r="http://schemas.openxmlformats.org/officeDocument/2006/relationships">
-  <p:cSld>
-    <p:spTree>
-      <p:nvGrpSpPr>
-        <p:cNvPr id="1" name=""/>
-        <p:cNvGrpSpPr/>
-        <p:nvPr/>
-      </p:nvGrpSpPr>
-      <p:grpSpPr/>
-      <p:sp>
-        <p:nvSpPr>
-          <p:cNvPr id="2" name="Title 1"/>
-          <p:cNvSpPr>
-            <a:spLocks noGrp="1"/>
-          </p:cNvSpPr>
-          <p:nvPr>
-            <p:ph type="title"/>
-          </p:nvPr>
-        </p:nvSpPr>
-        <p:spPr>
-          <a:xfrm>
-            <a:off x="468172" y="650138"/>
-            <a:ext cx="8206740" cy="616305"/>
-          </a:xfrm>
-        </p:spPr>
-        <p:txBody>
-          <a:bodyPr wrap="square" lIns="0" rIns="0" tIns="0" bIns="0">
-            <a:noAutofit/>
-          </a:bodyPr>
-          <a:lstStyle/>
-          <a:p>
-            <a:pPr algn="l">
-              <a:lnSpc>
-                <a:spcPct val="110000"/>
-              </a:lnSpc>
-              <a:buNone/>
-              <a:defRPr sz="2800" b="0">
-                <a:solidFill>
-                  <a:srgbClr val="303437"/>
-                </a:solidFill>
-                <a:latin typeface="Noto Sans"/>
-              </a:defRPr>
-            </a:pPr>
-            <a:r>
-              <a:rPr sz="2800" b="1" lang="ja-JP" altLang="en-US">
-                <a:solidFill>
-                  <a:srgbClr val="303437"/>
-                </a:solidFill>
-                <a:latin typeface="Noto Sans"/>
-                <a:ea typeface="Noto Sans CJK JP"/>
-                <a:cs typeface="Noto Sans"/>
-              </a:rPr>
-              <a:t>論文表と、取得した配布の値の差</a:t>
-            </a:r>
-          </a:p>
-        </p:txBody>
-      </p:sp>
-      <p:sp>
-        <p:nvSpPr>
-          <p:cNvPr id="3" name="Title 2"/>
-          <p:cNvSpPr>
-            <a:spLocks noGrp="1"/>
-          </p:cNvSpPr>
-          <p:nvPr>
-            <p:ph type="title" idx="2"/>
-          </p:nvPr>
-        </p:nvSpPr>
-        <p:spPr>
-          <a:xfrm>
-            <a:off x="75895" y="0"/>
-            <a:ext cx="8115300" cy="480060"/>
-          </a:xfrm>
-        </p:spPr>
-        <p:txBody>
-          <a:bodyPr wrap="square" lIns="0" rIns="0" tIns="0" bIns="0" anchor="ctr">
-            <a:noAutofit/>
-          </a:bodyPr>
-          <a:lstStyle/>
-          <a:p>
-            <a:pPr algn="l">
-              <a:lnSpc>
-                <a:spcPct val="110000"/>
-              </a:lnSpc>
-              <a:buNone/>
-              <a:defRPr sz="1400" b="0">
-                <a:solidFill>
-                  <a:srgbClr val="303437"/>
-                </a:solidFill>
-                <a:latin typeface="Noto Sans"/>
-              </a:defRPr>
-            </a:pPr>
-            <a:r>
-              <a:rPr sz="1400" b="1" lang="ja-JP" altLang="en-US">
-                <a:solidFill>
-                  <a:srgbClr val="FFFEF8"/>
-                </a:solidFill>
-                <a:latin typeface="Noto Sans"/>
-                <a:ea typeface="Noto Sans CJK JP"/>
-                <a:cs typeface="Noto Sans"/>
-              </a:rPr>
-              <a:t>Appendix: 2. 配布・注釈・評価の補足</a:t>
-            </a:r>
-          </a:p>
-        </p:txBody>
-      </p:sp>
-      <p:graphicFrame>
-        <p:nvGraphicFramePr>
-          <p:cNvPr id="4" name="Table 3"/>
-          <p:cNvGraphicFramePr>
-            <a:graphicFrameLocks noGrp="1"/>
-          </p:cNvGraphicFramePr>
-          <p:nvPr/>
-        </p:nvGraphicFramePr>
-        <p:xfrm>
-          <a:off x="548640" y="1508760"/>
-          <a:ext cx="8046720" cy="2263140"/>
-        </p:xfrm>
-        <a:graphic>
-          <a:graphicData uri="http://schemas.openxmlformats.org/drawingml/2006/table">
-            <a:tbl>
-              <a:tblPr firstRow="0" bandRow="0"/>
-              <a:tblGrid>
-                <a:gridCol w="3474720"/>
-                <a:gridCol w="2011680"/>
-                <a:gridCol w="2560320"/>
-              </a:tblGrid>
-              <a:tr h="377190">
-                <a:tc>
-                  <a:txBody>
-                    <a:bodyPr wrap="square">
-                      <a:noAutofit/>
-                    </a:bodyPr>
-                    <a:lstStyle/>
-                    <a:p>
-                      <a:pPr algn="l">
-                        <a:lnSpc>
-                          <a:spcPts val="2070"/>
-                        </a:lnSpc>
-                        <a:buNone/>
-                        <a:defRPr sz="1800" b="0">
-                          <a:solidFill>
-                            <a:srgbClr val="303437"/>
-                          </a:solidFill>
-                          <a:latin typeface="Noto Sans"/>
-                        </a:defRPr>
-                      </a:pPr>
-                      <a:r>
-                        <a:rPr sz="1800" b="0" lang="ja-JP" altLang="en-US">
-                          <a:solidFill>
-                            <a:srgbClr val="303437"/>
-                          </a:solidFill>
-                          <a:latin typeface="Noto Sans"/>
-                          <a:ea typeface="Noto Sans CJK JP"/>
-                          <a:cs typeface="Noto Sans"/>
-                        </a:rPr>
-                        <a:t>項目</a:t>
-                      </a:r>
-                    </a:p>
-                  </a:txBody>
-                  <a:tcPr marL="63500" marR="63500" marT="38100" marB="38100" anchor="ctr">
-                    <a:lnL w="7620">
-                      <a:noFill/>
-                    </a:lnL>
-                    <a:lnR w="7620">
-                      <a:noFill/>
-                    </a:lnR>
-                    <a:lnT w="15240">
-                      <a:solidFill>
-                        <a:srgbClr val="626669"/>
-                      </a:solidFill>
-                      <a:prstDash val="solid"/>
-                    </a:lnT>
-                    <a:lnB w="7620">
-                      <a:solidFill>
-                        <a:srgbClr val="626669"/>
-                      </a:solidFill>
-                      <a:prstDash val="solid"/>
-                    </a:lnB>
-                    <a:solidFill>
-                      <a:srgbClr val="FFFEF8"/>
-                    </a:solidFill>
-                  </a:tcPr>
-                </a:tc>
-                <a:tc>
-                  <a:txBody>
-                    <a:bodyPr wrap="square">
-                      <a:noAutofit/>
-                    </a:bodyPr>
-                    <a:lstStyle/>
-                    <a:p>
-                      <a:pPr algn="l">
-                        <a:lnSpc>
-                          <a:spcPts val="2070"/>
-                        </a:lnSpc>
-                        <a:buNone/>
-                        <a:defRPr sz="1800" b="0">
-                          <a:solidFill>
-                            <a:srgbClr val="303437"/>
-                          </a:solidFill>
-                          <a:latin typeface="Noto Sans"/>
-                        </a:defRPr>
-                      </a:pPr>
-                      <a:r>
-                        <a:rPr sz="1800" b="0" lang="ja-JP" altLang="en-US">
-                          <a:solidFill>
-                            <a:srgbClr val="303437"/>
-                          </a:solidFill>
-                          <a:latin typeface="Noto Sans"/>
-                          <a:ea typeface="Noto Sans CJK JP"/>
-                          <a:cs typeface="Noto Sans"/>
-                        </a:rPr>
-                        <a:t>論文</a:t>
-                      </a:r>
-                    </a:p>
-                  </a:txBody>
-                  <a:tcPr marL="63500" marR="63500" marT="38100" marB="38100" anchor="ctr">
-                    <a:lnL w="7620">
-                      <a:noFill/>
-                    </a:lnL>
-                    <a:lnR w="7620">
-                      <a:noFill/>
-                    </a:lnR>
-                    <a:lnT w="15240">
-                      <a:solidFill>
-                        <a:srgbClr val="626669"/>
-                      </a:solidFill>
-                      <a:prstDash val="solid"/>
-                    </a:lnT>
-                    <a:lnB w="7620">
-                      <a:solidFill>
-                        <a:srgbClr val="626669"/>
-                      </a:solidFill>
-                      <a:prstDash val="solid"/>
-                    </a:lnB>
-                    <a:solidFill>
-                      <a:srgbClr val="FFFEF8"/>
-                    </a:solidFill>
-                  </a:tcPr>
-                </a:tc>
-                <a:tc>
-                  <a:txBody>
-                    <a:bodyPr wrap="square">
-                      <a:noAutofit/>
-                    </a:bodyPr>
-                    <a:lstStyle/>
-                    <a:p>
-                      <a:pPr algn="l">
-                        <a:lnSpc>
-                          <a:spcPts val="2070"/>
-                        </a:lnSpc>
-                        <a:buNone/>
-                        <a:defRPr sz="1800" b="0">
-                          <a:solidFill>
-                            <a:srgbClr val="303437"/>
-                          </a:solidFill>
-                          <a:latin typeface="Noto Sans"/>
-                        </a:defRPr>
-                      </a:pPr>
-                      <a:r>
-                        <a:rPr sz="1800" b="0" lang="ja-JP" altLang="en-US">
-                          <a:solidFill>
-                            <a:srgbClr val="303437"/>
-                          </a:solidFill>
-                          <a:latin typeface="Noto Sans"/>
-                          <a:ea typeface="Noto Sans CJK JP"/>
-                          <a:cs typeface="Noto Sans"/>
-                        </a:rPr>
-                        <a:t>取得配布</a:t>
-                      </a:r>
-                    </a:p>
-                  </a:txBody>
-                  <a:tcPr marL="63500" marR="63500" marT="38100" marB="38100" anchor="ctr">
-                    <a:lnL w="7620">
-                      <a:noFill/>
-                    </a:lnL>
-                    <a:lnR w="7620">
-                      <a:noFill/>
-                    </a:lnR>
-                    <a:lnT w="15240">
-                      <a:solidFill>
-                        <a:srgbClr val="626669"/>
-                      </a:solidFill>
-                      <a:prstDash val="solid"/>
-                    </a:lnT>
-                    <a:lnB w="7620">
-                      <a:solidFill>
-                        <a:srgbClr val="626669"/>
-                      </a:solidFill>
-                      <a:prstDash val="solid"/>
-                    </a:lnB>
-                    <a:solidFill>
-                      <a:srgbClr val="FFFEF8"/>
-                    </a:solidFill>
-                  </a:tcPr>
-                </a:tc>
-              </a:tr>
-              <a:tr h="377190">
-                <a:tc>
-                  <a:txBody>
-                    <a:bodyPr wrap="square">
-                      <a:noAutofit/>
-                    </a:bodyPr>
-                    <a:lstStyle/>
-                    <a:p>
-                      <a:pPr algn="l">
-                        <a:lnSpc>
-                          <a:spcPts val="2070"/>
-                        </a:lnSpc>
-                        <a:buNone/>
-                        <a:defRPr sz="1800" b="0">
-                          <a:solidFill>
-                            <a:srgbClr val="303437"/>
-                          </a:solidFill>
-                          <a:latin typeface="Noto Sans"/>
-                        </a:defRPr>
-                      </a:pPr>
-                      <a:r>
-                        <a:rPr sz="1800" b="0" lang="ja-JP" altLang="en-US">
-                          <a:solidFill>
-                            <a:srgbClr val="303437"/>
-                          </a:solidFill>
-                          <a:latin typeface="Noto Sans"/>
-                          <a:ea typeface="Noto Sans CJK JP"/>
-                          <a:cs typeface="Noto Sans"/>
-                        </a:rPr>
-                        <a:t>train反証数</a:t>
-                      </a:r>
-                    </a:p>
-                  </a:txBody>
-                  <a:tcPr marL="63500" marR="63500" marT="38100" marB="38100" anchor="ctr">
-                    <a:lnL w="7620">
-                      <a:noFill/>
-                    </a:lnL>
-                    <a:lnR w="7620">
-                      <a:noFill/>
-                    </a:lnR>
-                    <a:lnT w="7620">
-                      <a:solidFill>
-                        <a:srgbClr val="626669"/>
-                      </a:solidFill>
-                      <a:prstDash val="solid"/>
-                    </a:lnT>
-                    <a:lnB w="7620">
-                      <a:noFill/>
-                    </a:lnB>
-                    <a:solidFill>
-                      <a:srgbClr val="FFFEF8"/>
-                    </a:solidFill>
-                  </a:tcPr>
-                </a:tc>
-                <a:tc>
-                  <a:txBody>
-                    <a:bodyPr wrap="square">
-                      <a:noAutofit/>
-                    </a:bodyPr>
-                    <a:lstStyle/>
-                    <a:p>
-                      <a:pPr algn="l">
-                        <a:lnSpc>
-                          <a:spcPts val="2070"/>
-                        </a:lnSpc>
-                        <a:buNone/>
-                        <a:defRPr sz="1800" b="0">
-                          <a:solidFill>
-                            <a:srgbClr val="303437"/>
-                          </a:solidFill>
-                          <a:latin typeface="Noto Sans"/>
-                        </a:defRPr>
-                      </a:pPr>
-                      <a:r>
-                        <a:rPr sz="1800" b="0" lang="ja-JP" altLang="en-US">
-                          <a:solidFill>
-                            <a:srgbClr val="303437"/>
-                          </a:solidFill>
-                          <a:latin typeface="Noto Sans"/>
-                          <a:ea typeface="Noto Sans CJK JP"/>
-                          <a:cs typeface="Noto Sans"/>
-                        </a:rPr>
-                        <a:t>4,399</a:t>
-                      </a:r>
-                    </a:p>
-                  </a:txBody>
-                  <a:tcPr marL="63500" marR="63500" marT="38100" marB="38100" anchor="ctr">
-                    <a:lnL w="7620">
-                      <a:noFill/>
-                    </a:lnL>
-                    <a:lnR w="7620">
-                      <a:noFill/>
-                    </a:lnR>
-                    <a:lnT w="7620">
-                      <a:solidFill>
-                        <a:srgbClr val="626669"/>
-                      </a:solidFill>
-                      <a:prstDash val="solid"/>
-                    </a:lnT>
-                    <a:lnB w="7620">
-                      <a:noFill/>
-                    </a:lnB>
-                    <a:solidFill>
-                      <a:srgbClr val="FFFEF8"/>
-                    </a:solidFill>
-                  </a:tcPr>
-                </a:tc>
-                <a:tc>
-                  <a:txBody>
-                    <a:bodyPr wrap="square">
-                      <a:noAutofit/>
-                    </a:bodyPr>
-                    <a:lstStyle/>
-                    <a:p>
-                      <a:pPr algn="l">
-                        <a:lnSpc>
-                          <a:spcPts val="2070"/>
-                        </a:lnSpc>
-                        <a:buNone/>
-                        <a:defRPr sz="1800" b="0">
-                          <a:solidFill>
-                            <a:srgbClr val="303437"/>
-                          </a:solidFill>
-                          <a:latin typeface="Noto Sans"/>
-                        </a:defRPr>
-                      </a:pPr>
-                      <a:r>
-                        <a:rPr sz="1800" b="0" lang="ja-JP" altLang="en-US">
-                          <a:solidFill>
-                            <a:srgbClr val="303437"/>
-                          </a:solidFill>
-                          <a:latin typeface="Noto Sans"/>
-                          <a:ea typeface="Noto Sans CJK JP"/>
-                          <a:cs typeface="Noto Sans"/>
-                        </a:rPr>
-                        <a:t>4,349</a:t>
-                      </a:r>
-                    </a:p>
-                  </a:txBody>
-                  <a:tcPr marL="63500" marR="63500" marT="38100" marB="38100" anchor="ctr">
-                    <a:lnL w="7620">
-                      <a:noFill/>
-                    </a:lnL>
-                    <a:lnR w="7620">
-                      <a:noFill/>
-                    </a:lnR>
-                    <a:lnT w="7620">
-                      <a:solidFill>
-                        <a:srgbClr val="626669"/>
-                      </a:solidFill>
-                      <a:prstDash val="solid"/>
-                    </a:lnT>
-                    <a:lnB w="7620">
-                      <a:noFill/>
-                    </a:lnB>
-                    <a:solidFill>
-                      <a:srgbClr val="FFFEF8"/>
-                    </a:solidFill>
-                  </a:tcPr>
-                </a:tc>
-              </a:tr>
-              <a:tr h="377190">
-                <a:tc>
-                  <a:txBody>
-                    <a:bodyPr wrap="square">
-                      <a:noAutofit/>
-                    </a:bodyPr>
-                    <a:lstStyle/>
-                    <a:p>
-                      <a:pPr algn="l">
-                        <a:lnSpc>
-                          <a:spcPts val="2070"/>
-                        </a:lnSpc>
-                        <a:buNone/>
-                        <a:defRPr sz="1800" b="0">
-                          <a:solidFill>
-                            <a:srgbClr val="303437"/>
-                          </a:solidFill>
-                          <a:latin typeface="Noto Sans"/>
-                        </a:defRPr>
-                      </a:pPr>
-                      <a:r>
-                        <a:rPr sz="1800" b="0" lang="ja-JP" altLang="en-US">
-                          <a:solidFill>
-                            <a:srgbClr val="303437"/>
-                          </a:solidFill>
-                          <a:latin typeface="Noto Sans"/>
-                          <a:ea typeface="Noto Sans CJK JP"/>
-                          <a:cs typeface="Noto Sans"/>
-                        </a:rPr>
-                        <a:t>Jiaozhen由来</a:t>
-                      </a:r>
-                    </a:p>
-                  </a:txBody>
-                  <a:tcPr marL="63500" marR="63500" marT="38100" marB="38100" anchor="ctr">
-                    <a:lnL w="7620">
-                      <a:noFill/>
-                    </a:lnL>
-                    <a:lnR w="7620">
-                      <a:noFill/>
-                    </a:lnR>
-                    <a:lnT w="7620">
-                      <a:noFill/>
-                    </a:lnT>
-                    <a:lnB w="7620">
-                      <a:noFill/>
-                    </a:lnB>
-                    <a:solidFill>
-                      <a:srgbClr val="FFFEF8"/>
-                    </a:solidFill>
-                  </a:tcPr>
-                </a:tc>
-                <a:tc>
-                  <a:txBody>
-                    <a:bodyPr wrap="square">
-                      <a:noAutofit/>
-                    </a:bodyPr>
-                    <a:lstStyle/>
-                    <a:p>
-                      <a:pPr algn="l">
-                        <a:lnSpc>
-                          <a:spcPts val="2070"/>
-                        </a:lnSpc>
-                        <a:buNone/>
-                        <a:defRPr sz="1800" b="0">
-                          <a:solidFill>
-                            <a:srgbClr val="303437"/>
-                          </a:solidFill>
-                          <a:latin typeface="Noto Sans"/>
-                        </a:defRPr>
-                      </a:pPr>
-                      <a:r>
-                        <a:rPr sz="1800" b="0" lang="ja-JP" altLang="en-US">
-                          <a:solidFill>
-                            <a:srgbClr val="303437"/>
-                          </a:solidFill>
-                          <a:latin typeface="Noto Sans"/>
-                          <a:ea typeface="Noto Sans CJK JP"/>
-                          <a:cs typeface="Noto Sans"/>
-                        </a:rPr>
-                        <a:t>157</a:t>
-                      </a:r>
-                    </a:p>
-                  </a:txBody>
-                  <a:tcPr marL="63500" marR="63500" marT="38100" marB="38100" anchor="ctr">
-                    <a:lnL w="7620">
-                      <a:noFill/>
-                    </a:lnL>
-                    <a:lnR w="7620">
-                      <a:noFill/>
-                    </a:lnR>
-                    <a:lnT w="7620">
-                      <a:noFill/>
-                    </a:lnT>
-                    <a:lnB w="7620">
-                      <a:noFill/>
-                    </a:lnB>
-                    <a:solidFill>
-                      <a:srgbClr val="FFFEF8"/>
-                    </a:solidFill>
-                  </a:tcPr>
-                </a:tc>
-                <a:tc>
-                  <a:txBody>
-                    <a:bodyPr wrap="square">
-                      <a:noAutofit/>
-                    </a:bodyPr>
-                    <a:lstStyle/>
-                    <a:p>
-                      <a:pPr algn="l">
-                        <a:lnSpc>
-                          <a:spcPts val="2070"/>
-                        </a:lnSpc>
-                        <a:buNone/>
-                        <a:defRPr sz="1800" b="0">
-                          <a:solidFill>
-                            <a:srgbClr val="303437"/>
-                          </a:solidFill>
-                          <a:latin typeface="Noto Sans"/>
-                        </a:defRPr>
-                      </a:pPr>
-                      <a:r>
-                        <a:rPr sz="1800" b="0" lang="ja-JP" altLang="en-US">
-                          <a:solidFill>
-                            <a:srgbClr val="303437"/>
-                          </a:solidFill>
-                          <a:latin typeface="Noto Sans"/>
-                          <a:ea typeface="Noto Sans CJK JP"/>
-                          <a:cs typeface="Noto Sans"/>
-                        </a:rPr>
-                        <a:t>56</a:t>
-                      </a:r>
-                    </a:p>
-                  </a:txBody>
-                  <a:tcPr marL="63500" marR="63500" marT="38100" marB="38100" anchor="ctr">
-                    <a:lnL w="7620">
-                      <a:noFill/>
-                    </a:lnL>
-                    <a:lnR w="7620">
-                      <a:noFill/>
-                    </a:lnR>
-                    <a:lnT w="7620">
-                      <a:noFill/>
-                    </a:lnT>
-                    <a:lnB w="7620">
-                      <a:noFill/>
-                    </a:lnB>
-                    <a:solidFill>
-                      <a:srgbClr val="FFFEF8"/>
-                    </a:solidFill>
-                  </a:tcPr>
-                </a:tc>
-              </a:tr>
-              <a:tr h="377190">
-                <a:tc>
-                  <a:txBody>
-                    <a:bodyPr wrap="square">
-                      <a:noAutofit/>
-                    </a:bodyPr>
-                    <a:lstStyle/>
-                    <a:p>
-                      <a:pPr algn="l">
-                        <a:lnSpc>
-                          <a:spcPts val="2070"/>
-                        </a:lnSpc>
-                        <a:buNone/>
-                        <a:defRPr sz="1800" b="0">
-                          <a:solidFill>
-                            <a:srgbClr val="303437"/>
-                          </a:solidFill>
-                          <a:latin typeface="Noto Sans"/>
-                        </a:defRPr>
-                      </a:pPr>
-                      <a:r>
-                        <a:rPr sz="1800" b="0" lang="ja-JP" altLang="en-US">
-                          <a:solidFill>
-                            <a:srgbClr val="303437"/>
-                          </a:solidFill>
-                          <a:latin typeface="Noto Sans"/>
-                          <a:ea typeface="Noto Sans CJK JP"/>
-                          <a:cs typeface="Noto Sans"/>
-                        </a:rPr>
-                        <a:t>Cnews由来</a:t>
-                      </a:r>
-                    </a:p>
-                  </a:txBody>
-                  <a:tcPr marL="63500" marR="63500" marT="38100" marB="38100" anchor="ctr">
-                    <a:lnL w="7620">
-                      <a:noFill/>
-                    </a:lnL>
-                    <a:lnR w="7620">
-                      <a:noFill/>
-                    </a:lnR>
-                    <a:lnT w="7620">
-                      <a:noFill/>
-                    </a:lnT>
-                    <a:lnB w="7620">
-                      <a:noFill/>
-                    </a:lnB>
-                    <a:solidFill>
-                      <a:srgbClr val="FFFEF8"/>
-                    </a:solidFill>
-                  </a:tcPr>
-                </a:tc>
-                <a:tc>
-                  <a:txBody>
-                    <a:bodyPr wrap="square">
-                      <a:noAutofit/>
-                    </a:bodyPr>
-                    <a:lstStyle/>
-                    <a:p>
-                      <a:pPr algn="l">
-                        <a:lnSpc>
-                          <a:spcPts val="2070"/>
-                        </a:lnSpc>
-                        <a:buNone/>
-                        <a:defRPr sz="1800" b="0">
-                          <a:solidFill>
-                            <a:srgbClr val="303437"/>
-                          </a:solidFill>
-                          <a:latin typeface="Noto Sans"/>
-                        </a:defRPr>
-                      </a:pPr>
-                      <a:r>
-                        <a:rPr sz="1800" b="0" lang="ja-JP" altLang="en-US">
-                          <a:solidFill>
-                            <a:srgbClr val="303437"/>
-                          </a:solidFill>
-                          <a:latin typeface="Noto Sans"/>
-                          <a:ea typeface="Noto Sans CJK JP"/>
-                          <a:cs typeface="Noto Sans"/>
-                        </a:rPr>
-                        <a:t>2,689</a:t>
-                      </a:r>
-                    </a:p>
-                  </a:txBody>
-                  <a:tcPr marL="63500" marR="63500" marT="38100" marB="38100" anchor="ctr">
-                    <a:lnL w="7620">
-                      <a:noFill/>
-                    </a:lnL>
-                    <a:lnR w="7620">
-                      <a:noFill/>
-                    </a:lnR>
-                    <a:lnT w="7620">
-                      <a:noFill/>
-                    </a:lnT>
-                    <a:lnB w="7620">
-                      <a:noFill/>
-                    </a:lnB>
-                    <a:solidFill>
-                      <a:srgbClr val="FFFEF8"/>
-                    </a:solidFill>
-                  </a:tcPr>
-                </a:tc>
-                <a:tc>
-                  <a:txBody>
-                    <a:bodyPr wrap="square">
-                      <a:noAutofit/>
-                    </a:bodyPr>
-                    <a:lstStyle/>
-                    <a:p>
-                      <a:pPr algn="l">
-                        <a:lnSpc>
-                          <a:spcPts val="2070"/>
-                        </a:lnSpc>
-                        <a:buNone/>
-                        <a:defRPr sz="1800" b="0">
-                          <a:solidFill>
-                            <a:srgbClr val="303437"/>
-                          </a:solidFill>
-                          <a:latin typeface="Noto Sans"/>
-                        </a:defRPr>
-                      </a:pPr>
-                      <a:r>
-                        <a:rPr sz="1800" b="0" lang="ja-JP" altLang="en-US">
-                          <a:solidFill>
-                            <a:srgbClr val="303437"/>
-                          </a:solidFill>
-                          <a:latin typeface="Noto Sans"/>
-                          <a:ea typeface="Noto Sans CJK JP"/>
-                          <a:cs typeface="Noto Sans"/>
-                        </a:rPr>
-                        <a:t>2,789</a:t>
-                      </a:r>
-                    </a:p>
-                  </a:txBody>
-                  <a:tcPr marL="63500" marR="63500" marT="38100" marB="38100" anchor="ctr">
-                    <a:lnL w="7620">
-                      <a:noFill/>
-                    </a:lnL>
-                    <a:lnR w="7620">
-                      <a:noFill/>
-                    </a:lnR>
-                    <a:lnT w="7620">
-                      <a:noFill/>
-                    </a:lnT>
-                    <a:lnB w="7620">
-                      <a:noFill/>
-                    </a:lnB>
-                    <a:solidFill>
-                      <a:srgbClr val="FFFEF8"/>
-                    </a:solidFill>
-                  </a:tcPr>
-                </a:tc>
-              </a:tr>
-              <a:tr h="377190">
-                <a:tc>
-                  <a:txBody>
-                    <a:bodyPr wrap="square">
-                      <a:noAutofit/>
-                    </a:bodyPr>
-                    <a:lstStyle/>
-                    <a:p>
-                      <a:pPr algn="l">
-                        <a:lnSpc>
-                          <a:spcPts val="2070"/>
-                        </a:lnSpc>
-                        <a:buNone/>
-                        <a:defRPr sz="1800" b="0">
-                          <a:solidFill>
-                            <a:srgbClr val="303437"/>
-                          </a:solidFill>
-                          <a:latin typeface="Noto Sans"/>
-                        </a:defRPr>
-                      </a:pPr>
-                      <a:r>
-                        <a:rPr sz="1800" b="0" lang="ja-JP" altLang="en-US">
-                          <a:solidFill>
-                            <a:srgbClr val="303437"/>
-                          </a:solidFill>
-                          <a:latin typeface="Noto Sans"/>
-                          <a:ea typeface="Noto Sans CJK JP"/>
-                          <a:cs typeface="Noto Sans"/>
-                        </a:rPr>
-                        <a:t>Piyao由来</a:t>
-                      </a:r>
-                    </a:p>
-                  </a:txBody>
-                  <a:tcPr marL="63500" marR="63500" marT="38100" marB="38100" anchor="ctr">
-                    <a:lnL w="7620">
-                      <a:noFill/>
-                    </a:lnL>
-                    <a:lnR w="7620">
-                      <a:noFill/>
-                    </a:lnR>
-                    <a:lnT w="7620">
-                      <a:noFill/>
-                    </a:lnT>
-                    <a:lnB w="7620">
-                      <a:noFill/>
-                    </a:lnB>
-                    <a:solidFill>
-                      <a:srgbClr val="FFFEF8"/>
-                    </a:solidFill>
-                  </a:tcPr>
-                </a:tc>
-                <a:tc>
-                  <a:txBody>
-                    <a:bodyPr wrap="square">
-                      <a:noAutofit/>
-                    </a:bodyPr>
-                    <a:lstStyle/>
-                    <a:p>
-                      <a:pPr algn="l">
-                        <a:lnSpc>
-                          <a:spcPts val="2070"/>
-                        </a:lnSpc>
-                        <a:buNone/>
-                        <a:defRPr sz="1800" b="0">
-                          <a:solidFill>
-                            <a:srgbClr val="303437"/>
-                          </a:solidFill>
-                          <a:latin typeface="Noto Sans"/>
-                        </a:defRPr>
-                      </a:pPr>
-                      <a:r>
-                        <a:rPr sz="1800" b="0" lang="ja-JP" altLang="en-US">
-                          <a:solidFill>
-                            <a:srgbClr val="303437"/>
-                          </a:solidFill>
-                          <a:latin typeface="Noto Sans"/>
-                          <a:ea typeface="Noto Sans CJK JP"/>
-                          <a:cs typeface="Noto Sans"/>
-                        </a:rPr>
-                        <a:t>3,741</a:t>
-                      </a:r>
-                    </a:p>
-                  </a:txBody>
-                  <a:tcPr marL="63500" marR="63500" marT="38100" marB="38100" anchor="ctr">
-                    <a:lnL w="7620">
-                      <a:noFill/>
-                    </a:lnL>
-                    <a:lnR w="7620">
-                      <a:noFill/>
-                    </a:lnR>
-                    <a:lnT w="7620">
-                      <a:noFill/>
-                    </a:lnT>
-                    <a:lnB w="7620">
-                      <a:noFill/>
-                    </a:lnB>
-                    <a:solidFill>
-                      <a:srgbClr val="FFFEF8"/>
-                    </a:solidFill>
-                  </a:tcPr>
-                </a:tc>
-                <a:tc>
-                  <a:txBody>
-                    <a:bodyPr wrap="square">
-                      <a:noAutofit/>
-                    </a:bodyPr>
-                    <a:lstStyle/>
-                    <a:p>
-                      <a:pPr algn="l">
-                        <a:lnSpc>
-                          <a:spcPts val="2070"/>
-                        </a:lnSpc>
-                        <a:buNone/>
-                        <a:defRPr sz="1800" b="0">
-                          <a:solidFill>
-                            <a:srgbClr val="303437"/>
-                          </a:solidFill>
-                          <a:latin typeface="Noto Sans"/>
-                        </a:defRPr>
-                      </a:pPr>
-                      <a:r>
-                        <a:rPr sz="1800" b="0" lang="ja-JP" altLang="en-US">
-                          <a:solidFill>
-                            <a:srgbClr val="303437"/>
-                          </a:solidFill>
-                          <a:latin typeface="Noto Sans"/>
-                          <a:ea typeface="Noto Sans CJK JP"/>
-                          <a:cs typeface="Noto Sans"/>
-                        </a:rPr>
-                        <a:t>3,741＋表記違い1</a:t>
-                      </a:r>
-                    </a:p>
-                  </a:txBody>
-                  <a:tcPr marL="63500" marR="63500" marT="38100" marB="38100" anchor="ctr">
-                    <a:lnL w="7620">
-                      <a:noFill/>
-                    </a:lnL>
-                    <a:lnR w="7620">
-                      <a:noFill/>
-                    </a:lnR>
-                    <a:lnT w="7620">
-                      <a:noFill/>
-                    </a:lnT>
-                    <a:lnB w="7620">
-                      <a:noFill/>
-                    </a:lnB>
-                    <a:solidFill>
-                      <a:srgbClr val="FFFEF8"/>
-                    </a:solidFill>
-                  </a:tcPr>
-                </a:tc>
-              </a:tr>
-              <a:tr h="377190">
-                <a:tc>
-                  <a:txBody>
-                    <a:bodyPr wrap="square">
-                      <a:noAutofit/>
-                    </a:bodyPr>
-                    <a:lstStyle/>
-                    <a:p>
-                      <a:pPr algn="l">
-                        <a:lnSpc>
-                          <a:spcPts val="2070"/>
-                        </a:lnSpc>
-                        <a:buNone/>
-                        <a:defRPr sz="1800" b="0">
-                          <a:solidFill>
-                            <a:srgbClr val="303437"/>
-                          </a:solidFill>
-                          <a:latin typeface="Noto Sans"/>
-                        </a:defRPr>
-                      </a:pPr>
-                      <a:r>
-                        <a:rPr sz="1800" b="0" lang="ja-JP" altLang="en-US">
-                          <a:solidFill>
-                            <a:srgbClr val="303437"/>
-                          </a:solidFill>
-                          <a:latin typeface="Noto Sans"/>
-                          <a:ea typeface="Noto Sans CJK JP"/>
-                          <a:cs typeface="Noto Sans"/>
-                        </a:rPr>
-                        <a:t>領域の種類</a:t>
-                      </a:r>
-                    </a:p>
-                  </a:txBody>
-                  <a:tcPr marL="63500" marR="63500" marT="38100" marB="38100" anchor="ctr">
-                    <a:lnL w="7620">
-                      <a:noFill/>
-                    </a:lnL>
-                    <a:lnR w="7620">
-                      <a:noFill/>
-                    </a:lnR>
-                    <a:lnT w="7620">
-                      <a:noFill/>
-                    </a:lnT>
-                    <a:lnB w="15240">
-                      <a:solidFill>
-                        <a:srgbClr val="626669"/>
-                      </a:solidFill>
-                      <a:prstDash val="solid"/>
-                    </a:lnB>
-                    <a:solidFill>
-                      <a:srgbClr val="FFFEF8"/>
-                    </a:solidFill>
-                  </a:tcPr>
-                </a:tc>
-                <a:tc>
-                  <a:txBody>
-                    <a:bodyPr wrap="square">
-                      <a:noAutofit/>
-                    </a:bodyPr>
-                    <a:lstStyle/>
-                    <a:p>
-                      <a:pPr algn="l">
-                        <a:lnSpc>
-                          <a:spcPts val="2070"/>
-                        </a:lnSpc>
-                        <a:buNone/>
-                        <a:defRPr sz="1800" b="0">
-                          <a:solidFill>
-                            <a:srgbClr val="303437"/>
-                          </a:solidFill>
-                          <a:latin typeface="Noto Sans"/>
-                        </a:defRPr>
-                      </a:pPr>
-                      <a:r>
-                        <a:rPr sz="1800" b="0" lang="ja-JP" altLang="en-US">
-                          <a:solidFill>
-                            <a:srgbClr val="303437"/>
-                          </a:solidFill>
-                          <a:latin typeface="Noto Sans"/>
-                          <a:ea typeface="Noto Sans CJK JP"/>
-                          <a:cs typeface="Noto Sans"/>
-                        </a:rPr>
-                        <a:t>5領域</a:t>
-                      </a:r>
-                    </a:p>
-                  </a:txBody>
-                  <a:tcPr marL="63500" marR="63500" marT="38100" marB="38100" anchor="ctr">
-                    <a:lnL w="7620">
-                      <a:noFill/>
-                    </a:lnL>
-                    <a:lnR w="7620">
-                      <a:noFill/>
-                    </a:lnR>
-                    <a:lnT w="7620">
-                      <a:noFill/>
-                    </a:lnT>
-                    <a:lnB w="15240">
-                      <a:solidFill>
-                        <a:srgbClr val="626669"/>
-                      </a:solidFill>
-                      <a:prstDash val="solid"/>
-                    </a:lnB>
-                    <a:solidFill>
-                      <a:srgbClr val="FFFEF8"/>
-                    </a:solidFill>
-                  </a:tcPr>
-                </a:tc>
-                <a:tc>
-                  <a:txBody>
-                    <a:bodyPr wrap="square">
-                      <a:noAutofit/>
-                    </a:bodyPr>
-                    <a:lstStyle/>
-                    <a:p>
-                      <a:pPr algn="l">
-                        <a:lnSpc>
-                          <a:spcPts val="2070"/>
-                        </a:lnSpc>
-                        <a:buNone/>
-                        <a:defRPr sz="1800" b="0">
-                          <a:solidFill>
-                            <a:srgbClr val="303437"/>
-                          </a:solidFill>
-                          <a:latin typeface="Noto Sans"/>
-                        </a:defRPr>
-                      </a:pPr>
-                      <a:r>
-                        <a:rPr sz="1800" b="0" lang="ja-JP" altLang="en-US">
-                          <a:solidFill>
-                            <a:srgbClr val="303437"/>
-                          </a:solidFill>
-                          <a:latin typeface="Noto Sans"/>
-                          <a:ea typeface="Noto Sans CJK JP"/>
-                          <a:cs typeface="Noto Sans"/>
-                        </a:rPr>
-                        <a:t>6原表記（生活7件）</a:t>
-                      </a:r>
-                    </a:p>
-                  </a:txBody>
-                  <a:tcPr marL="63500" marR="63500" marT="38100" marB="38100" anchor="ctr">
-                    <a:lnL w="7620">
-                      <a:noFill/>
-                    </a:lnL>
-                    <a:lnR w="7620">
-                      <a:noFill/>
-                    </a:lnR>
-                    <a:lnT w="7620">
-                      <a:noFill/>
-                    </a:lnT>
-                    <a:lnB w="15240">
-                      <a:solidFill>
-                        <a:srgbClr val="626669"/>
-                      </a:solidFill>
-                      <a:prstDash val="solid"/>
-                    </a:lnB>
-                    <a:solidFill>
-                      <a:srgbClr val="FFFEF8"/>
-                    </a:solidFill>
-                  </a:tcPr>
-                </a:tc>
-              </a:tr>
-            </a:tbl>
-          </a:graphicData>
-        </a:graphic>
-      </p:graphicFrame>
-      <p:sp>
-        <p:nvSpPr>
-          <p:cNvPr id="5" name="TextBox 4"/>
-          <p:cNvSpPr txBox="1"/>
-          <p:nvPr/>
-        </p:nvSpPr>
-        <p:spPr>
-          <a:xfrm>
-            <a:off x="594360" y="3826763"/>
-            <a:ext cx="7955279" cy="658368"/>
-          </a:xfrm>
-          <a:prstGeom prst="rect">
-            <a:avLst/>
-          </a:prstGeom>
-          <a:noFill/>
-        </p:spPr>
-        <p:txBody>
-          <a:bodyPr wrap="square" lIns="0" rIns="0" tIns="0" bIns="0">
-            <a:noAutofit/>
-          </a:bodyPr>
-          <a:lstStyle/>
-          <a:p>
-            <a:pPr algn="l">
-              <a:lnSpc>
-                <a:spcPts val="2047"/>
-              </a:lnSpc>
-              <a:spcBef>
-                <a:spcPts val="0"/>
-              </a:spcBef>
-              <a:spcAft>
-                <a:spcPts val="0"/>
-              </a:spcAft>
-              <a:buNone/>
-              <a:defRPr sz="1750" b="0">
-                <a:solidFill>
-                  <a:srgbClr val="303437"/>
-                </a:solidFill>
-                <a:latin typeface="Noto Sans"/>
-              </a:defRPr>
-            </a:pPr>
-            <a:r>
-              <a:rPr sz="1750" b="0" lang="ja-JP" altLang="en-US">
-                <a:solidFill>
-                  <a:srgbClr val="303437"/>
-                </a:solidFill>
-                <a:latin typeface="Noto Sans"/>
-                <a:ea typeface="Noto Sans CJK JP"/>
-                <a:cs typeface="Noto Sans"/>
-              </a:rPr>
-              <a:t>不一致の理由は公開情報だけでは確定しない。全体10,000件とtrain計8,002件は一致する。</a:t>
-            </a:r>
-          </a:p>
-        </p:txBody>
-      </p:sp>
-      <p:sp>
-        <p:nvSpPr>
-          <p:cNvPr id="6" name="sources"/>
-          <p:cNvSpPr txBox="1"/>
-          <p:nvPr/>
-        </p:nvSpPr>
-        <p:spPr>
-          <a:xfrm>
-            <a:off x="502920" y="4700016"/>
-            <a:ext cx="8183879" cy="530352"/>
-          </a:xfrm>
-          <a:prstGeom prst="rect">
-            <a:avLst/>
-          </a:prstGeom>
-          <a:noFill/>
-        </p:spPr>
-        <p:txBody>
-          <a:bodyPr wrap="square" lIns="0" rIns="0" tIns="0" bIns="0">
-            <a:noAutofit/>
-          </a:bodyPr>
-          <a:lstStyle/>
-          <a:p>
-            <a:pPr algn="l">
-              <a:lnSpc>
-                <a:spcPts val="940"/>
-              </a:lnSpc>
-              <a:spcBef>
-                <a:spcPts val="0"/>
-              </a:spcBef>
-              <a:spcAft>
-                <a:spcPts val="400"/>
-              </a:spcAft>
-              <a:buNone/>
-              <a:defRPr sz="810" b="0">
-                <a:solidFill>
-                  <a:srgbClr val="303437"/>
-                </a:solidFill>
-                <a:latin typeface="Noto Sans"/>
-              </a:defRPr>
-            </a:pPr>
-            <a:r>
-              <a:rPr sz="810" b="0" lang="ja-JP" altLang="en-US">
-                <a:solidFill>
-                  <a:srgbClr val="626669"/>
-                </a:solidFill>
-                <a:latin typeface="Noto Sans"/>
-                <a:ea typeface="Noto Sans CJK JP"/>
-                <a:cs typeface="Noto Sans"/>
-              </a:rPr>
-              <a:t>[1] Hu, Guo, Wu, Liu, Wen and Yu (2022). CHEF. NAACL-HLT, pp3362–3376.</a:t>
-            </a:r>
-            <a:r>
-              <a:rPr sz="810" b="0" lang="ja-JP" altLang="en-US">
-                <a:solidFill>
-                  <a:srgbClr val="626669"/>
-                </a:solidFill>
-                <a:latin typeface="Noto Sans"/>
-                <a:ea typeface="Noto Sans CJK JP"/>
-                <a:cs typeface="Noto Sans"/>
-              </a:rPr>
-              <a:t>  </a:t>
-            </a:r>
-            <a:r>
-              <a:rPr sz="810" b="0" lang="ja-JP" altLang="en-US">
-                <a:solidFill>
-                  <a:srgbClr val="626669"/>
-                </a:solidFill>
-                <a:latin typeface="Noto Sans"/>
-                <a:ea typeface="Noto Sans CJK JP"/>
-                <a:cs typeface="Noto Sans"/>
-                <a:hlinkClick r:id="rId2"/>
-              </a:rPr>
-              <a:t>https://aclanthology.org/2022.naacl-main.246/</a:t>
-            </a:r>
-          </a:p>
-          <a:p>
-            <a:pPr>
-              <a:lnSpc>
-                <a:spcPts val="940"/>
-              </a:lnSpc>
-              <a:spcAft>
-                <a:spcPts val="400"/>
-              </a:spcAft>
-              <a:buNone/>
-              <a:defRPr sz="810" b="0">
-                <a:solidFill>
-                  <a:srgbClr val="303437"/>
-                </a:solidFill>
-                <a:latin typeface="Noto Sans"/>
-              </a:defRPr>
-            </a:pPr>
-            <a:r>
-              <a:rPr sz="810" b="0" lang="ja-JP" altLang="en-US">
-                <a:solidFill>
-                  <a:srgbClr val="626669"/>
-                </a:solidFill>
-                <a:latin typeface="Noto Sans"/>
-                <a:ea typeface="Noto Sans CJK JP"/>
-                <a:cs typeface="Noto Sans"/>
-              </a:rPr>
-              <a:t>[2] THU-BPM. CHEF公式CHEF.tar.gz、train/dev/test原JSON。</a:t>
-            </a:r>
-            <a:r>
-              <a:rPr sz="810" b="0" lang="ja-JP" altLang="en-US">
-                <a:solidFill>
-                  <a:srgbClr val="626669"/>
-                </a:solidFill>
-                <a:latin typeface="Noto Sans"/>
-                <a:ea typeface="Noto Sans CJK JP"/>
-                <a:cs typeface="Noto Sans"/>
-              </a:rPr>
-              <a:t>  </a:t>
-            </a:r>
-            <a:r>
-              <a:rPr sz="810" b="0" lang="ja-JP" altLang="en-US">
-                <a:solidFill>
-                  <a:srgbClr val="626669"/>
-                </a:solidFill>
-                <a:latin typeface="Noto Sans"/>
-                <a:ea typeface="Noto Sans CJK JP"/>
-                <a:cs typeface="Noto Sans"/>
-                <a:hlinkClick r:id="rId3"/>
-              </a:rPr>
-              <a:t>https://drive.google.com/file/d/1QKe9i-yXDKh87p4ukRFSnzE03-hAzMto/view</a:t>
-            </a:r>
-          </a:p>
-        </p:txBody>
-      </p:sp>
-    </p:spTree>
-  </p:cSld>
-  <p:clrMapOvr>
-    <a:masterClrMapping/>
-  </p:clrMapOvr>
-</p:sld>
-</file>
-
-<file path=ppt/slides/slide53.xml><?xml version="1.0" encoding="utf-8"?>
-<p:sld xmlns:a="http://schemas.openxmlformats.org/drawingml/2006/main" xmlns:p="http://schemas.openxmlformats.org/presentationml/2006/main" xmlns:r="http://schemas.openxmlformats.org/officeDocument/2006/relationships">
-  <p:cSld>
-    <p:spTree>
-      <p:nvGrpSpPr>
-        <p:cNvPr id="1" name=""/>
-        <p:cNvGrpSpPr/>
-        <p:nvPr/>
-      </p:nvGrpSpPr>
-      <p:grpSpPr/>
-      <p:sp>
-        <p:nvSpPr>
-          <p:cNvPr id="2" name="Title 1"/>
-          <p:cNvSpPr>
-            <a:spLocks noGrp="1"/>
-          </p:cNvSpPr>
-          <p:nvPr>
-            <p:ph type="title"/>
-          </p:nvPr>
-        </p:nvSpPr>
-        <p:spPr>
-          <a:xfrm>
-            <a:off x="468172" y="650138"/>
-            <a:ext cx="8206740" cy="616305"/>
-          </a:xfrm>
-        </p:spPr>
-        <p:txBody>
-          <a:bodyPr wrap="square" lIns="0" rIns="0" tIns="0" bIns="0">
-            <a:noAutofit/>
-          </a:bodyPr>
-          <a:lstStyle/>
-          <a:p>
-            <a:pPr algn="l">
-              <a:lnSpc>
-                <a:spcPct val="110000"/>
-              </a:lnSpc>
-              <a:buNone/>
-              <a:defRPr sz="2800" b="0">
-                <a:solidFill>
-                  <a:srgbClr val="303437"/>
-                </a:solidFill>
-                <a:latin typeface="Noto Sans"/>
-              </a:defRPr>
-            </a:pPr>
-            <a:r>
-              <a:rPr sz="2800" b="1" lang="ja-JP" altLang="en-US">
-                <a:solidFill>
-                  <a:srgbClr val="303437"/>
-                </a:solidFill>
-                <a:latin typeface="Noto Sans"/>
-                <a:ea typeface="Noto Sans CJK JP"/>
-                <a:cs typeface="Noto Sans"/>
-              </a:rPr>
-              <a:t>IDと配布列を、独立に追える形で残す</a:t>
-            </a:r>
-          </a:p>
-        </p:txBody>
-      </p:sp>
-      <p:sp>
-        <p:nvSpPr>
-          <p:cNvPr id="3" name="Text Placeholder 2"/>
-          <p:cNvSpPr>
-            <a:spLocks noGrp="1"/>
-          </p:cNvSpPr>
-          <p:nvPr>
-            <p:ph type="body" idx="1"/>
-          </p:nvPr>
-        </p:nvSpPr>
-        <p:spPr>
-          <a:xfrm>
-            <a:off x="594360" y="1463040"/>
-            <a:ext cx="7955279" cy="3044952"/>
-          </a:xfrm>
-        </p:spPr>
-        <p:txBody>
-          <a:bodyPr wrap="square" tIns="91440" bIns="91440">
-            <a:noAutofit/>
-          </a:bodyPr>
-          <a:lstStyle/>
-          <a:p>
-            <a:pPr marL="457200" indent="-355600">
-              <a:lnSpc>
-                <a:spcPts val="2379"/>
-              </a:lnSpc>
-              <a:spcAft>
-                <a:spcPts val="700"/>
-              </a:spcAft>
-              <a:buSzPct val="66500"/>
-              <a:buFont typeface="Noto Sans CJK JP"/>
-              <a:buChar char="●"/>
-              <a:defRPr sz="2000" b="0">
-                <a:solidFill>
-                  <a:srgbClr val="303437"/>
-                </a:solidFill>
-                <a:latin typeface="Noto Sans"/>
-              </a:defRPr>
-            </a:pPr>
-            <a:r>
-              <a:rPr sz="2000" b="0" lang="ja-JP" altLang="en-US">
-                <a:solidFill>
-                  <a:srgbClr val="303437"/>
-                </a:solidFill>
-                <a:latin typeface="Noto Sans"/>
-                <a:ea typeface="Noto Sans CJK JP"/>
-                <a:cs typeface="Noto Sans"/>
-              </a:rPr>
-              <a:t>claimIdを文字列にそろえると、10,000行の中で851行分が重複する。主張文字列にも369行分の重複がある。実例はsplit・行位置・claimId・レコードSHA-256で同定する。</a:t>
-            </a:r>
-          </a:p>
-          <a:p>
-            <a:pPr marL="457200" indent="-355600">
-              <a:lnSpc>
-                <a:spcPts val="2379"/>
-              </a:lnSpc>
-              <a:spcAft>
-                <a:spcPts val="700"/>
-              </a:spcAft>
-              <a:buSzPct val="66500"/>
-              <a:buFont typeface="Noto Sans CJK JP"/>
-              <a:buChar char="●"/>
-              <a:defRPr sz="2000" b="0">
-                <a:solidFill>
-                  <a:srgbClr val="303437"/>
-                </a:solidFill>
-                <a:latin typeface="Noto Sans"/>
-              </a:defRPr>
-            </a:pPr>
-            <a:r>
-              <a:rPr sz="2000" b="0" lang="ja-JP" altLang="en-US">
-                <a:solidFill>
-                  <a:srgbClr val="303437"/>
-                </a:solidFill>
-                <a:latin typeface="Noto Sans"/>
-                <a:ea typeface="Noto Sans CJK JP"/>
-                <a:cs typeface="Noto Sans"/>
-              </a:rPr>
-              <a:t>Pipeline合成例の配列番号1127は、原trainの行番号128とは異なる（両方0始まり）。元のclaimIdは977。</a:t>
-            </a:r>
-          </a:p>
-          <a:p>
-            <a:pPr marL="457200" indent="-355600">
-              <a:lnSpc>
-                <a:spcPts val="2379"/>
-              </a:lnSpc>
-              <a:spcAft>
-                <a:spcPts val="0"/>
-              </a:spcAft>
-              <a:buSzPct val="66500"/>
-              <a:buFont typeface="Noto Sans CJK JP"/>
-              <a:buChar char="●"/>
-              <a:defRPr sz="2000" b="0">
-                <a:solidFill>
-                  <a:srgbClr val="303437"/>
-                </a:solidFill>
-                <a:latin typeface="Noto Sans"/>
-              </a:defRPr>
-            </a:pPr>
-            <a:r>
-              <a:rPr sz="2000" b="0" lang="ja-JP" altLang="en-US">
-                <a:solidFill>
-                  <a:srgbClr val="303437"/>
-                </a:solidFill>
-                <a:latin typeface="Noto Sans"/>
-                <a:ea typeface="Noto Sans CJK JP"/>
-                <a:cs typeface="Noto Sans"/>
-              </a:rPr>
-              <a:t>成都の元レコードのdomainは「文化」で、題材から推測して付け直していない。重複したgold文や原文の誤字も、原票のまま保持する。</a:t>
-            </a:r>
-          </a:p>
-        </p:txBody>
-      </p:sp>
-      <p:sp>
-        <p:nvSpPr>
-          <p:cNvPr id="4" name="Title 3"/>
-          <p:cNvSpPr>
-            <a:spLocks noGrp="1"/>
-          </p:cNvSpPr>
-          <p:nvPr>
-            <p:ph type="title" idx="2"/>
-          </p:nvPr>
-        </p:nvSpPr>
-        <p:spPr>
-          <a:xfrm>
-            <a:off x="75895" y="0"/>
-            <a:ext cx="8115300" cy="480060"/>
-          </a:xfrm>
-        </p:spPr>
-        <p:txBody>
-          <a:bodyPr wrap="square" lIns="0" rIns="0" tIns="0" bIns="0" anchor="ctr">
-            <a:noAutofit/>
-          </a:bodyPr>
-          <a:lstStyle/>
-          <a:p>
-            <a:pPr algn="l">
-              <a:lnSpc>
-                <a:spcPct val="110000"/>
-              </a:lnSpc>
-              <a:buNone/>
-              <a:defRPr sz="1400" b="0">
-                <a:solidFill>
-                  <a:srgbClr val="303437"/>
-                </a:solidFill>
-                <a:latin typeface="Noto Sans"/>
-              </a:defRPr>
-            </a:pPr>
-            <a:r>
-              <a:rPr sz="1400" b="1" lang="ja-JP" altLang="en-US">
-                <a:solidFill>
-                  <a:srgbClr val="FFFEF8"/>
-                </a:solidFill>
-                <a:latin typeface="Noto Sans"/>
-                <a:ea typeface="Noto Sans CJK JP"/>
-                <a:cs typeface="Noto Sans"/>
-              </a:rPr>
-              <a:t>Appendix: 2. 配布・注釈・評価の補足</a:t>
-            </a:r>
-          </a:p>
-        </p:txBody>
-      </p:sp>
-      <p:sp>
-        <p:nvSpPr>
-          <p:cNvPr id="5" name="sources"/>
-          <p:cNvSpPr txBox="1"/>
-          <p:nvPr/>
-        </p:nvSpPr>
-        <p:spPr>
-          <a:xfrm>
-            <a:off x="502920" y="4700016"/>
-            <a:ext cx="8183879" cy="530352"/>
-          </a:xfrm>
-          <a:prstGeom prst="rect">
-            <a:avLst/>
-          </a:prstGeom>
-          <a:noFill/>
-        </p:spPr>
-        <p:txBody>
-          <a:bodyPr wrap="square" lIns="0" rIns="0" tIns="0" bIns="0">
-            <a:noAutofit/>
-          </a:bodyPr>
-          <a:lstStyle/>
-          <a:p>
-            <a:pPr algn="l">
-              <a:lnSpc>
-                <a:spcPts val="940"/>
-              </a:lnSpc>
-              <a:spcBef>
-                <a:spcPts val="0"/>
-              </a:spcBef>
-              <a:spcAft>
-                <a:spcPts val="400"/>
-              </a:spcAft>
-              <a:buNone/>
-              <a:defRPr sz="810" b="0">
-                <a:solidFill>
-                  <a:srgbClr val="303437"/>
-                </a:solidFill>
-                <a:latin typeface="Noto Sans"/>
-              </a:defRPr>
-            </a:pPr>
-            <a:r>
-              <a:rPr sz="810" b="0" lang="ja-JP" altLang="en-US">
-                <a:solidFill>
-                  <a:srgbClr val="626669"/>
-                </a:solidFill>
-                <a:latin typeface="Noto Sans"/>
-                <a:ea typeface="Noto Sans CJK JP"/>
-                <a:cs typeface="Noto Sans"/>
-              </a:rPr>
-              <a:t>[1] THU-BPM. CHEF公式CHEF.tar.gz、train/dev/test原JSON。</a:t>
+              <a:t>[1] THU-BPM. CHEF データセット。</a:t>
             </a:r>
             <a:r>
               <a:rPr sz="810" b="0" lang="ja-JP" altLang="en-US">
@@ -30697,7 +28272,7 @@
                 <a:ea typeface="Noto Sans CJK JP"/>
                 <a:cs typeface="Noto Sans"/>
               </a:rPr>
-              <a:t>BERT系：公開された固定比較（1/2）</a:t>
+              <a:t>BERT系：根拠別の評価結果（1/2）</a:t>
             </a:r>
           </a:p>
         </p:txBody>
@@ -30745,7 +28320,7 @@
                 <a:ea typeface="Noto Sans CJK JP"/>
                 <a:cs typeface="Noto Sans"/>
               </a:rPr>
-              <a:t>Appendix: 2. 配布・注釈・評価の補足</a:t>
+              <a:t>Appendix: 2. 根拠データの特徴と評価結果</a:t>
             </a:r>
           </a:p>
         </p:txBody>
@@ -31978,7 +29553,7 @@
                 <a:ea typeface="Noto Sans CJK JP"/>
                 <a:cs typeface="Noto Sans"/>
               </a:rPr>
-              <a:t>[1] Hu, Guo, Wu, Liu, Wen and Yu (2022). CHEF. NAACL-HLT, pp3362–3376.</a:t>
+              <a:t>[1] Hu et al. (2022). CHEF. NAACL-HLT.</a:t>
             </a:r>
             <a:r>
               <a:rPr sz="810" b="0" lang="ja-JP" altLang="en-US">
@@ -32067,7 +29642,7 @@
                 <a:ea typeface="Noto Sans CJK JP"/>
                 <a:cs typeface="Noto Sans"/>
               </a:rPr>
-              <a:t>BERT系：公開された固定比較（2/2）</a:t>
+              <a:t>BERT系：根拠別の評価結果（2/2）</a:t>
             </a:r>
           </a:p>
         </p:txBody>
@@ -32115,7 +29690,7 @@
                 <a:ea typeface="Noto Sans CJK JP"/>
                 <a:cs typeface="Noto Sans"/>
               </a:rPr>
-              <a:t>Appendix: 2. 配布・注釈・評価の補足</a:t>
+              <a:t>Appendix: 2. 根拠データの特徴と評価結果</a:t>
             </a:r>
           </a:p>
         </p:txBody>
@@ -33348,7 +30923,7 @@
                 <a:ea typeface="Noto Sans CJK JP"/>
                 <a:cs typeface="Noto Sans"/>
               </a:rPr>
-              <a:t>[1] Hu, Guo, Wu, Liu, Wen and Yu (2022). CHEF. NAACL-HLT, pp3362–3376.</a:t>
+              <a:t>[1] Hu et al. (2022). CHEF. NAACL-HLT.</a:t>
             </a:r>
             <a:r>
               <a:rPr sz="810" b="0" lang="ja-JP" altLang="en-US">
@@ -33437,7 +31012,7 @@
                 <a:ea typeface="Noto Sans CJK JP"/>
                 <a:cs typeface="Noto Sans"/>
               </a:rPr>
-              <a:t>Attention系：公開された固定比較（1/2）</a:t>
+              <a:t>Attention系：根拠別の評価結果（1/2）</a:t>
             </a:r>
           </a:p>
         </p:txBody>
@@ -33485,7 +31060,7 @@
                 <a:ea typeface="Noto Sans CJK JP"/>
                 <a:cs typeface="Noto Sans"/>
               </a:rPr>
-              <a:t>Appendix: 2. 配布・注釈・評価の補足</a:t>
+              <a:t>Appendix: 2. 根拠データの特徴と評価結果</a:t>
             </a:r>
           </a:p>
         </p:txBody>
@@ -34718,7 +32293,7 @@
                 <a:ea typeface="Noto Sans CJK JP"/>
                 <a:cs typeface="Noto Sans"/>
               </a:rPr>
-              <a:t>[1] Hu, Guo, Wu, Liu, Wen and Yu (2022). CHEF. NAACL-HLT, pp3362–3376.</a:t>
+              <a:t>[1] Hu et al. (2022). CHEF. NAACL-HLT.</a:t>
             </a:r>
             <a:r>
               <a:rPr sz="810" b="0" lang="ja-JP" altLang="en-US">
@@ -34807,7 +32382,7 @@
                 <a:ea typeface="Noto Sans CJK JP"/>
                 <a:cs typeface="Noto Sans"/>
               </a:rPr>
-              <a:t>Attention系：公開された固定比較（2/2）</a:t>
+              <a:t>Attention系：根拠別の評価結果（2/2）</a:t>
             </a:r>
           </a:p>
         </p:txBody>
@@ -34855,7 +32430,7 @@
                 <a:ea typeface="Noto Sans CJK JP"/>
                 <a:cs typeface="Noto Sans"/>
               </a:rPr>
-              <a:t>Appendix: 2. 配布・注釈・評価の補足</a:t>
+              <a:t>Appendix: 2. 根拠データの特徴と評価結果</a:t>
             </a:r>
           </a:p>
         </p:txBody>
@@ -36088,7 +33663,7 @@
                 <a:ea typeface="Noto Sans CJK JP"/>
                 <a:cs typeface="Noto Sans"/>
               </a:rPr>
-              <a:t>[1] Hu, Guo, Wu, Liu, Wen and Yu (2022). CHEF. NAACL-HLT, pp3362–3376.</a:t>
+              <a:t>[1] Hu et al. (2022). CHEF. NAACL-HLT.</a:t>
             </a:r>
             <a:r>
               <a:rPr sz="810" b="0" lang="ja-JP" altLang="en-US">
@@ -36177,7 +33752,7 @@
                 <a:ea typeface="Noto Sans CJK JP"/>
                 <a:cs typeface="Noto Sans"/>
               </a:rPr>
-              <a:t>Graph系：公開された固定比較（1/2）</a:t>
+              <a:t>Graph系：根拠別の評価結果（1/2）</a:t>
             </a:r>
           </a:p>
         </p:txBody>
@@ -36225,7 +33800,7 @@
                 <a:ea typeface="Noto Sans CJK JP"/>
                 <a:cs typeface="Noto Sans"/>
               </a:rPr>
-              <a:t>Appendix: 2. 配布・注釈・評価の補足</a:t>
+              <a:t>Appendix: 2. 根拠データの特徴と評価結果</a:t>
             </a:r>
           </a:p>
         </p:txBody>
@@ -37458,7 +35033,7 @@
                 <a:ea typeface="Noto Sans CJK JP"/>
                 <a:cs typeface="Noto Sans"/>
               </a:rPr>
-              <a:t>[1] Hu, Guo, Wu, Liu, Wen and Yu (2022). CHEF. NAACL-HLT, pp3362–3376.</a:t>
+              <a:t>[1] Hu et al. (2022). CHEF. NAACL-HLT.</a:t>
             </a:r>
             <a:r>
               <a:rPr sz="810" b="0" lang="ja-JP" altLang="en-US">
@@ -37547,7 +35122,7 @@
                 <a:ea typeface="Noto Sans CJK JP"/>
                 <a:cs typeface="Noto Sans"/>
               </a:rPr>
-              <a:t>Graph系：公開された固定比較（2/2）</a:t>
+              <a:t>Graph系：根拠別の評価結果（2/2）</a:t>
             </a:r>
           </a:p>
         </p:txBody>
@@ -37595,7 +35170,7 @@
                 <a:ea typeface="Noto Sans CJK JP"/>
                 <a:cs typeface="Noto Sans"/>
               </a:rPr>
-              <a:t>Appendix: 2. 配布・注釈・評価の補足</a:t>
+              <a:t>Appendix: 2. 根拠データの特徴と評価結果</a:t>
             </a:r>
           </a:p>
         </p:txBody>
@@ -38828,7 +36403,7 @@
                 <a:ea typeface="Noto Sans CJK JP"/>
                 <a:cs typeface="Noto Sans"/>
               </a:rPr>
-              <a:t>[1] Hu, Guo, Wu, Liu, Wen and Yu (2022). CHEF. NAACL-HLT, pp3362–3376.</a:t>
+              <a:t>[1] Hu et al. (2022). CHEF. NAACL-HLT.</a:t>
             </a:r>
             <a:r>
               <a:rPr sz="810" b="0" lang="ja-JP" altLang="en-US">
@@ -39641,61 +37216,7 @@
       </p:graphicFrame>
       <p:sp>
         <p:nvSpPr>
-          <p:cNvPr id="5" name="TextBox 4"/>
-          <p:cNvSpPr txBox="1"/>
-          <p:nvPr/>
-        </p:nvSpPr>
-        <p:spPr>
-          <a:xfrm>
-            <a:off x="594360" y="3465576"/>
-            <a:ext cx="7955279" cy="658368"/>
-          </a:xfrm>
-          <a:prstGeom prst="rect">
-            <a:avLst/>
-          </a:prstGeom>
-          <a:noFill/>
-        </p:spPr>
-        <p:txBody>
-          <a:bodyPr wrap="square" lIns="0" rIns="0" tIns="0" bIns="0">
-            <a:noAutofit/>
-          </a:bodyPr>
-          <a:lstStyle/>
-          <a:p>
-            <a:pPr algn="l">
-              <a:lnSpc>
-                <a:spcPts val="2047"/>
-              </a:lnSpc>
-              <a:spcBef>
-                <a:spcPts val="0"/>
-              </a:spcBef>
-              <a:spcAft>
-                <a:spcPts val="0"/>
-              </a:spcAft>
-              <a:buNone/>
-              <a:defRPr sz="1750" b="0">
-                <a:solidFill>
-                  <a:srgbClr val="303437"/>
-                </a:solidFill>
-                <a:latin typeface="Noto Sans"/>
-              </a:defRPr>
-            </a:pPr>
-            <a:r>
-              <a:rPr sz="1750" b="0" lang="ja-JP" altLang="en-US">
-                <a:solidFill>
-                  <a:srgbClr val="303437"/>
-                </a:solidFill>
-                <a:latin typeface="Noto Sans"/>
-                <a:ea typeface="Noto Sans CJK JP"/>
-                <a:cs typeface="Noto Sans"/>
-              </a:rPr>
-              <a:t>ここで示す正解は配布された注釈。時点や主張の範囲を伴い、現在の一般的な真偽へ一律に置き換えない。</a:t>
-            </a:r>
-          </a:p>
-        </p:txBody>
-      </p:sp>
-      <p:sp>
-        <p:nvSpPr>
-          <p:cNvPr id="6" name="sources"/>
+          <p:cNvPr id="5" name="sources"/>
           <p:cNvSpPr txBox="1"/>
           <p:nvPr/>
         </p:nvSpPr>
@@ -39742,7 +37263,7 @@
                 <a:ea typeface="Noto Sans CJK JP"/>
                 <a:cs typeface="Noto Sans"/>
               </a:rPr>
-              <a:t>[1] Hu, Guo, Wu, Liu, Wen and Yu (2022). CHEF. NAACL-HLT, pp3362–3376.</a:t>
+              <a:t>[1] Hu et al. (2022). CHEF. NAACL-HLT.</a:t>
             </a:r>
             <a:r>
               <a:rPr sz="810" b="0" lang="ja-JP" altLang="en-US">
@@ -39831,7 +37352,7 @@
                 <a:ea typeface="Noto Sans CJK JP"/>
                 <a:cs typeface="Noto Sans"/>
               </a:rPr>
-              <a:t>配布のラベル数を、短いコードで再集計する</a:t>
+              <a:t>JSONから、主張・正解・根拠を読む</a:t>
             </a:r>
           </a:p>
         </p:txBody>
@@ -39879,7 +37400,7 @@
                 <a:ea typeface="Noto Sans CJK JP"/>
                 <a:cs typeface="Noto Sans"/>
               </a:rPr>
-              <a:t>Appendix: 2. 配布・注釈・評価の補足</a:t>
+              <a:t>Appendix: 2. 根拠データの特徴と評価結果</a:t>
             </a:r>
           </a:p>
         </p:txBody>
@@ -39893,7 +37414,7 @@
         <p:spPr>
           <a:xfrm>
             <a:off x="548640" y="1572768"/>
-            <a:ext cx="8046720" cy="1667933"/>
+            <a:ext cx="8046720" cy="2103120"/>
           </a:xfrm>
           <a:prstGeom prst="rect">
             <a:avLst/>
@@ -39928,7 +37449,7 @@
           <a:p>
             <a:pPr algn="l">
               <a:lnSpc>
-                <a:spcPts val="1989"/>
+                <a:spcPts val="1700"/>
               </a:lnSpc>
               <a:spcBef>
                 <a:spcPts val="0"/>
@@ -39945,7 +37466,7 @@
               </a:defRPr>
             </a:pPr>
             <a:r>
-              <a:rPr sz="1700" b="0" lang="ja-JP" altLang="en-US">
+              <a:rPr sz="1500" b="0" lang="ja-JP" altLang="en-US">
                 <a:solidFill>
                   <a:srgbClr val="303437"/>
                 </a:solidFill>
@@ -39959,7 +37480,7 @@
           <a:p>
             <a:pPr algn="l">
               <a:lnSpc>
-                <a:spcPts val="1989"/>
+                <a:spcPts val="1700"/>
               </a:lnSpc>
               <a:spcBef>
                 <a:spcPts val="0"/>
@@ -39976,7 +37497,7 @@
               </a:defRPr>
             </a:pPr>
             <a:r>
-              <a:rPr sz="1700" b="0" lang="ja-JP" altLang="en-US">
+              <a:rPr sz="1500" b="0" lang="ja-JP" altLang="en-US">
                 <a:solidFill>
                   <a:srgbClr val="303437"/>
                 </a:solidFill>
@@ -39984,13 +37505,13 @@
                 <a:ea typeface="Noto Sans CJK JP"/>
                 <a:cs typeface="Noto Sans"/>
               </a:rPr>
-              <a:t>from collections import Counter</a:t>
+              <a:t>rows = json.load(open("train.json", encoding="utf-8"))</a:t>
             </a:r>
           </a:p>
           <a:p>
             <a:pPr algn="l">
               <a:lnSpc>
-                <a:spcPts val="1989"/>
+                <a:spcPts val="1700"/>
               </a:lnSpc>
               <a:spcBef>
                 <a:spcPts val="0"/>
@@ -40007,7 +37528,7 @@
               </a:defRPr>
             </a:pPr>
             <a:r>
-              <a:rPr sz="1700" b="0" lang="ja-JP" altLang="en-US">
+              <a:rPr sz="1500" b="0" lang="ja-JP" altLang="en-US">
                 <a:solidFill>
                   <a:srgbClr val="303437"/>
                 </a:solidFill>
@@ -40015,13 +37536,13 @@
                 <a:ea typeface="Noto Sans CJK JP"/>
                 <a:cs typeface="Noto Sans"/>
               </a:rPr>
-              <a:t>with open("train.json", encoding="utf-8") as f:</a:t>
+              <a:t>claim = "2021年，金星上没有发现生命。"</a:t>
             </a:r>
           </a:p>
           <a:p>
             <a:pPr algn="l">
               <a:lnSpc>
-                <a:spcPts val="1989"/>
+                <a:spcPts val="1700"/>
               </a:lnSpc>
               <a:spcBef>
                 <a:spcPts val="0"/>
@@ -40038,7 +37559,7 @@
               </a:defRPr>
             </a:pPr>
             <a:r>
-              <a:rPr sz="1700" b="0" lang="ja-JP" altLang="en-US">
+              <a:rPr sz="1500" b="0" lang="ja-JP" altLang="en-US">
                 <a:solidFill>
                   <a:srgbClr val="303437"/>
                 </a:solidFill>
@@ -40046,13 +37567,13 @@
                 <a:ea typeface="Noto Sans CJK JP"/>
                 <a:cs typeface="Noto Sans"/>
               </a:rPr>
-              <a:t>    rows = json.load(f)</a:t>
+              <a:t>record = next(r for r in rows if r["claim"] == claim)</a:t>
             </a:r>
           </a:p>
           <a:p>
             <a:pPr algn="l">
               <a:lnSpc>
-                <a:spcPts val="1989"/>
+                <a:spcPts val="1700"/>
               </a:lnSpc>
               <a:spcBef>
                 <a:spcPts val="0"/>
@@ -40069,7 +37590,7 @@
               </a:defRPr>
             </a:pPr>
             <a:r>
-              <a:rPr sz="1700" b="0" lang="ja-JP" altLang="en-US">
+              <a:rPr sz="1500" b="0" lang="ja-JP" altLang="en-US">
                 <a:solidFill>
                   <a:srgbClr val="303437"/>
                 </a:solidFill>
@@ -40077,13 +37598,13 @@
                 <a:ea typeface="Noto Sans CJK JP"/>
                 <a:cs typeface="Noto Sans"/>
               </a:rPr>
-              <a:t>print(len(rows))</a:t>
+              <a:t>print(record["claim"])</a:t>
             </a:r>
           </a:p>
           <a:p>
             <a:pPr algn="l">
               <a:lnSpc>
-                <a:spcPts val="1989"/>
+                <a:spcPts val="1700"/>
               </a:lnSpc>
               <a:spcBef>
                 <a:spcPts val="0"/>
@@ -40100,7 +37621,7 @@
               </a:defRPr>
             </a:pPr>
             <a:r>
-              <a:rPr sz="1700" b="0" lang="ja-JP" altLang="en-US">
+              <a:rPr sz="1500" b="0" lang="ja-JP" altLang="en-US">
                 <a:solidFill>
                   <a:srgbClr val="303437"/>
                 </a:solidFill>
@@ -40108,7 +37629,100 @@
                 <a:ea typeface="Noto Sans CJK JP"/>
                 <a:cs typeface="Noto Sans"/>
               </a:rPr>
-              <a:t>print(Counter(row["label"] for row in rows))</a:t>
+              <a:t>print(["支持", "反証", "情報不足"][record["label"]])</a:t>
+            </a:r>
+          </a:p>
+          <a:p>
+            <a:pPr algn="l">
+              <a:lnSpc>
+                <a:spcPts val="1700"/>
+              </a:lnSpc>
+              <a:spcBef>
+                <a:spcPts val="0"/>
+              </a:spcBef>
+              <a:spcAft>
+                <a:spcPts val="0"/>
+              </a:spcAft>
+              <a:buNone/>
+              <a:defRPr sz="1700" b="0">
+                <a:solidFill>
+                  <a:srgbClr val="303437"/>
+                </a:solidFill>
+                <a:latin typeface="Noto Sans"/>
+              </a:defRPr>
+            </a:pPr>
+            <a:r>
+              <a:rPr sz="1500" b="0" lang="ja-JP" altLang="en-US">
+                <a:solidFill>
+                  <a:srgbClr val="303437"/>
+                </a:solidFill>
+                <a:latin typeface="Liberation Mono"/>
+                <a:ea typeface="Noto Sans CJK JP"/>
+                <a:cs typeface="Noto Sans"/>
+              </a:rPr>
+              <a:t>for sentence in record["gold evidence"].values():</a:t>
+            </a:r>
+          </a:p>
+          <a:p>
+            <a:pPr algn="l">
+              <a:lnSpc>
+                <a:spcPts val="1700"/>
+              </a:lnSpc>
+              <a:spcBef>
+                <a:spcPts val="0"/>
+              </a:spcBef>
+              <a:spcAft>
+                <a:spcPts val="0"/>
+              </a:spcAft>
+              <a:buNone/>
+              <a:defRPr sz="1700" b="0">
+                <a:solidFill>
+                  <a:srgbClr val="303437"/>
+                </a:solidFill>
+                <a:latin typeface="Noto Sans"/>
+              </a:defRPr>
+            </a:pPr>
+            <a:r>
+              <a:rPr sz="1500" b="0" lang="ja-JP" altLang="en-US">
+                <a:solidFill>
+                  <a:srgbClr val="303437"/>
+                </a:solidFill>
+                <a:latin typeface="Liberation Mono"/>
+                <a:ea typeface="Noto Sans CJK JP"/>
+                <a:cs typeface="Noto Sans"/>
+              </a:rPr>
+              <a:t>    if sentence["text"]:</a:t>
+            </a:r>
+          </a:p>
+          <a:p>
+            <a:pPr algn="l">
+              <a:lnSpc>
+                <a:spcPts val="1700"/>
+              </a:lnSpc>
+              <a:spcBef>
+                <a:spcPts val="0"/>
+              </a:spcBef>
+              <a:spcAft>
+                <a:spcPts val="0"/>
+              </a:spcAft>
+              <a:buNone/>
+              <a:defRPr sz="1700" b="0">
+                <a:solidFill>
+                  <a:srgbClr val="303437"/>
+                </a:solidFill>
+                <a:latin typeface="Noto Sans"/>
+              </a:defRPr>
+            </a:pPr>
+            <a:r>
+              <a:rPr sz="1500" b="0" lang="ja-JP" altLang="en-US">
+                <a:solidFill>
+                  <a:srgbClr val="303437"/>
+                </a:solidFill>
+                <a:latin typeface="Liberation Mono"/>
+                <a:ea typeface="Noto Sans CJK JP"/>
+                <a:cs typeface="Noto Sans"/>
+              </a:rPr>
+              <a:t>        print(sentence["text"])</a:t>
             </a:r>
           </a:p>
         </p:txBody>
@@ -40121,8 +37735,8 @@
         </p:nvSpPr>
         <p:spPr>
           <a:xfrm>
-            <a:off x="594360" y="3703320"/>
-            <a:ext cx="7955279" cy="640080"/>
+            <a:off x="594360" y="4023360"/>
+            <a:ext cx="7955279" cy="457200"/>
           </a:xfrm>
           <a:prstGeom prst="rect">
             <a:avLst/>
@@ -40162,7 +37776,7 @@
                 <a:ea typeface="Noto Sans CJK JP"/>
                 <a:cs typeface="Noto Sans"/>
               </a:rPr>
-              <a:t>実行結果：8,002件 ／ 0: 2,877、1: 4,349、2: 776。原配布JSONで実行して確認した。</a:t>
+              <a:t>実例1の主張、正解「支持」、人が選んだ根拠文が得られる。</a:t>
             </a:r>
           </a:p>
         </p:txBody>
@@ -40216,7 +37830,7 @@
                 <a:ea typeface="Noto Sans CJK JP"/>
                 <a:cs typeface="Noto Sans"/>
               </a:rPr>
-              <a:t>[1] THU-BPM. CHEF公式CHEF.tar.gz、train/dev/test原JSON。</a:t>
+              <a:t>[1] THU-BPM. CHEF データセット。</a:t>
             </a:r>
             <a:r>
               <a:rPr sz="810" b="0" lang="ja-JP" altLang="en-US">
@@ -40240,310 +37854,6 @@
                 <a:hlinkClick r:id="rId2"/>
               </a:rPr>
               <a:t>https://drive.google.com/file/d/1QKe9i-yXDKh87p4ukRFSnzE03-hAzMto/view</a:t>
-            </a:r>
-          </a:p>
-        </p:txBody>
-      </p:sp>
-    </p:spTree>
-  </p:cSld>
-  <p:clrMapOvr>
-    <a:masterClrMapping/>
-  </p:clrMapOvr>
-</p:sld>
-</file>
-
-<file path=ppt/slides/slide61.xml><?xml version="1.0" encoding="utf-8"?>
-<p:sld xmlns:a="http://schemas.openxmlformats.org/drawingml/2006/main" xmlns:p="http://schemas.openxmlformats.org/presentationml/2006/main" xmlns:r="http://schemas.openxmlformats.org/officeDocument/2006/relationships">
-  <p:cSld>
-    <p:spTree>
-      <p:nvGrpSpPr>
-        <p:cNvPr id="1" name=""/>
-        <p:cNvGrpSpPr/>
-        <p:nvPr/>
-      </p:nvGrpSpPr>
-      <p:grpSpPr/>
-      <p:sp>
-        <p:nvSpPr>
-          <p:cNvPr id="2" name="Title 1"/>
-          <p:cNvSpPr>
-            <a:spLocks noGrp="1"/>
-          </p:cNvSpPr>
-          <p:nvPr>
-            <p:ph type="title"/>
-          </p:nvPr>
-        </p:nvSpPr>
-        <p:spPr>
-          <a:xfrm>
-            <a:off x="468172" y="650138"/>
-            <a:ext cx="8206740" cy="616305"/>
-          </a:xfrm>
-        </p:spPr>
-        <p:txBody>
-          <a:bodyPr wrap="square" lIns="0" rIns="0" tIns="0" bIns="0">
-            <a:noAutofit/>
-          </a:bodyPr>
-          <a:lstStyle/>
-          <a:p>
-            <a:pPr algn="l">
-              <a:lnSpc>
-                <a:spcPct val="110000"/>
-              </a:lnSpc>
-              <a:buNone/>
-              <a:defRPr sz="2800" b="0">
-                <a:solidFill>
-                  <a:srgbClr val="303437"/>
-                </a:solidFill>
-                <a:latin typeface="Noto Sans"/>
-              </a:defRPr>
-            </a:pPr>
-            <a:r>
-              <a:rPr sz="2800" b="1" lang="ja-JP" altLang="en-US">
-                <a:solidFill>
-                  <a:srgbClr val="303437"/>
-                </a:solidFill>
-                <a:latin typeface="Noto Sans"/>
-                <a:ea typeface="Noto Sans CJK JP"/>
-                <a:cs typeface="Noto Sans"/>
-              </a:rPr>
-              <a:t>公開範囲と権利の確認</a:t>
-            </a:r>
-          </a:p>
-        </p:txBody>
-      </p:sp>
-      <p:sp>
-        <p:nvSpPr>
-          <p:cNvPr id="3" name="Text Placeholder 2"/>
-          <p:cNvSpPr>
-            <a:spLocks noGrp="1"/>
-          </p:cNvSpPr>
-          <p:nvPr>
-            <p:ph type="body" idx="1"/>
-          </p:nvPr>
-        </p:nvSpPr>
-        <p:spPr>
-          <a:xfrm>
-            <a:off x="594360" y="1463040"/>
-            <a:ext cx="7955279" cy="3044952"/>
-          </a:xfrm>
-        </p:spPr>
-        <p:txBody>
-          <a:bodyPr wrap="square" tIns="91440" bIns="91440">
-            <a:noAutofit/>
-          </a:bodyPr>
-          <a:lstStyle/>
-          <a:p>
-            <a:pPr marL="457200" indent="-355600">
-              <a:lnSpc>
-                <a:spcPts val="2379"/>
-              </a:lnSpc>
-              <a:spcAft>
-                <a:spcPts val="700"/>
-              </a:spcAft>
-              <a:buSzPct val="66500"/>
-              <a:buFont typeface="Noto Sans CJK JP"/>
-              <a:buChar char="●"/>
-              <a:defRPr sz="2000" b="0">
-                <a:solidFill>
-                  <a:srgbClr val="303437"/>
-                </a:solidFill>
-                <a:latin typeface="Noto Sans"/>
-              </a:defRPr>
-            </a:pPr>
-            <a:r>
-              <a:rPr sz="2000" b="0" lang="ja-JP" altLang="en-US">
-                <a:solidFill>
-                  <a:srgbClr val="303437"/>
-                </a:solidFill>
-                <a:latin typeface="Noto Sans"/>
-                <a:ea typeface="Noto Sans CJK JP"/>
-                <a:cs typeface="Noto Sans"/>
-              </a:rPr>
-              <a:t>公式リポジトリの主配布はCHEF.tar.gz。2026年10月18日に38,326,111 bytesを取得し、原3JSONとアーカイブのSHA-256を保存した。</a:t>
-            </a:r>
-          </a:p>
-          <a:p>
-            <a:pPr marL="457200" indent="-355600">
-              <a:lnSpc>
-                <a:spcPts val="2379"/>
-              </a:lnSpc>
-              <a:spcAft>
-                <a:spcPts val="700"/>
-              </a:spcAft>
-              <a:buSzPct val="66500"/>
-              <a:buFont typeface="Noto Sans CJK JP"/>
-              <a:buChar char="●"/>
-              <a:defRPr sz="2000" b="0">
-                <a:solidFill>
-                  <a:srgbClr val="303437"/>
-                </a:solidFill>
-                <a:latin typeface="Noto Sans"/>
-              </a:defRPr>
-            </a:pPr>
-            <a:r>
-              <a:rPr sz="2000" b="0" lang="ja-JP" altLang="en-US">
-                <a:solidFill>
-                  <a:srgbClr val="303437"/>
-                </a:solidFill>
-                <a:latin typeface="Noto Sans"/>
-                <a:ea typeface="Noto Sans CJK JP"/>
-                <a:cs typeface="Noto Sans"/>
-              </a:rPr>
-              <a:t>リポジトリ直下にデータ全体を明示するライセンスは見当たらない。Joint/LICENSEはJ. Bastings名義のMITで、取り込まれたコードの許諾を示す。</a:t>
-            </a:r>
-          </a:p>
-          <a:p>
-            <a:pPr marL="457200" indent="-355600">
-              <a:lnSpc>
-                <a:spcPts val="2379"/>
-              </a:lnSpc>
-              <a:spcAft>
-                <a:spcPts val="0"/>
-              </a:spcAft>
-              <a:buSzPct val="66500"/>
-              <a:buFont typeface="Noto Sans CJK JP"/>
-              <a:buChar char="●"/>
-              <a:defRPr sz="2000" b="0">
-                <a:solidFill>
-                  <a:srgbClr val="303437"/>
-                </a:solidFill>
-                <a:latin typeface="Noto Sans"/>
-              </a:defRPr>
-            </a:pPr>
-            <a:r>
-              <a:rPr sz="2000" b="0" lang="ja-JP" altLang="en-US">
-                <a:solidFill>
-                  <a:srgbClr val="303437"/>
-                </a:solidFill>
-                <a:latin typeface="Noto Sans"/>
-                <a:ea typeface="Noto Sans CJK JP"/>
-                <a:cs typeface="Noto Sans"/>
-              </a:rPr>
-              <a:t>主張と根拠は、元の事実検証・報道サイトに由来する。スライドは出典を伴う研究説明の引用で、日本語訳は本資料で作成した。</a:t>
-            </a:r>
-          </a:p>
-        </p:txBody>
-      </p:sp>
-      <p:sp>
-        <p:nvSpPr>
-          <p:cNvPr id="4" name="Title 3"/>
-          <p:cNvSpPr>
-            <a:spLocks noGrp="1"/>
-          </p:cNvSpPr>
-          <p:nvPr>
-            <p:ph type="title" idx="2"/>
-          </p:nvPr>
-        </p:nvSpPr>
-        <p:spPr>
-          <a:xfrm>
-            <a:off x="75895" y="0"/>
-            <a:ext cx="8115300" cy="480060"/>
-          </a:xfrm>
-        </p:spPr>
-        <p:txBody>
-          <a:bodyPr wrap="square" lIns="0" rIns="0" tIns="0" bIns="0" anchor="ctr">
-            <a:noAutofit/>
-          </a:bodyPr>
-          <a:lstStyle/>
-          <a:p>
-            <a:pPr algn="l">
-              <a:lnSpc>
-                <a:spcPct val="110000"/>
-              </a:lnSpc>
-              <a:buNone/>
-              <a:defRPr sz="1400" b="0">
-                <a:solidFill>
-                  <a:srgbClr val="303437"/>
-                </a:solidFill>
-                <a:latin typeface="Noto Sans"/>
-              </a:defRPr>
-            </a:pPr>
-            <a:r>
-              <a:rPr sz="1400" b="1" lang="ja-JP" altLang="en-US">
-                <a:solidFill>
-                  <a:srgbClr val="FFFEF8"/>
-                </a:solidFill>
-                <a:latin typeface="Noto Sans"/>
-                <a:ea typeface="Noto Sans CJK JP"/>
-                <a:cs typeface="Noto Sans"/>
-              </a:rPr>
-              <a:t>Appendix: 2. 配布・注釈・評価の補足</a:t>
-            </a:r>
-          </a:p>
-        </p:txBody>
-      </p:sp>
-      <p:sp>
-        <p:nvSpPr>
-          <p:cNvPr id="5" name="sources"/>
-          <p:cNvSpPr txBox="1"/>
-          <p:nvPr/>
-        </p:nvSpPr>
-        <p:spPr>
-          <a:xfrm>
-            <a:off x="502920" y="4700016"/>
-            <a:ext cx="8183879" cy="530352"/>
-          </a:xfrm>
-          <a:prstGeom prst="rect">
-            <a:avLst/>
-          </a:prstGeom>
-          <a:noFill/>
-        </p:spPr>
-        <p:txBody>
-          <a:bodyPr wrap="square" lIns="0" rIns="0" tIns="0" bIns="0">
-            <a:noAutofit/>
-          </a:bodyPr>
-          <a:lstStyle/>
-          <a:p>
-            <a:pPr algn="l">
-              <a:lnSpc>
-                <a:spcPts val="940"/>
-              </a:lnSpc>
-              <a:spcBef>
-                <a:spcPts val="0"/>
-              </a:spcBef>
-              <a:spcAft>
-                <a:spcPts val="400"/>
-              </a:spcAft>
-              <a:buNone/>
-              <a:defRPr sz="810" b="0">
-                <a:solidFill>
-                  <a:srgbClr val="303437"/>
-                </a:solidFill>
-                <a:latin typeface="Noto Sans"/>
-              </a:defRPr>
-            </a:pPr>
-            <a:r>
-              <a:rPr sz="810" b="0" lang="ja-JP" altLang="en-US">
-                <a:solidFill>
-                  <a:srgbClr val="626669"/>
-                </a:solidFill>
-                <a:latin typeface="Noto Sans"/>
-                <a:ea typeface="Noto Sans CJK JP"/>
-                <a:cs typeface="Noto Sans"/>
-              </a:rPr>
-              <a:t>[1] THU-BPM. CHEF公式配布。commit8909b3035c、2026-10-18取得。</a:t>
-            </a:r>
-            <a:r>
-              <a:rPr sz="810" b="0" lang="ja-JP" altLang="en-US">
-                <a:solidFill>
-                  <a:srgbClr val="626669"/>
-                </a:solidFill>
-                <a:latin typeface="Noto Sans"/>
-                <a:ea typeface="Noto Sans CJK JP"/>
-                <a:cs typeface="Noto Sans"/>
-              </a:rPr>
-              <a:t>  </a:t>
-            </a:r>
-            <a:r>
-              <a:rPr sz="810" b="0" lang="ja-JP" altLang="en-US">
-                <a:solidFill>
-                  <a:srgbClr val="626669"/>
-                </a:solidFill>
-                <a:latin typeface="Noto Sans"/>
-                <a:ea typeface="Noto Sans CJK JP"/>
-                <a:cs typeface="Noto Sans"/>
-                <a:hlinkClick r:id="rId2"/>
-              </a:rPr>
-              <a:t>https://github.com/THU-BPM/CHEF</a:t>
             </a:r>
           </a:p>
         </p:txBody>
@@ -40809,36 +38119,6 @@
               <a:t>清華大学、ケンブリッジ大学、イリノイ大学シカゴ校の研究者による研究で、非英語の実在主張を検証する資源を整備した。</a:t>
             </a:r>
           </a:p>
-          <a:p>
-            <a:pPr marL="457200" indent="-355600">
-              <a:lnSpc>
-                <a:spcPts val="2499"/>
-              </a:lnSpc>
-              <a:spcAft>
-                <a:spcPts val="0"/>
-              </a:spcAft>
-              <a:buSzPct val="63333"/>
-              <a:buFont typeface="Noto Sans CJK JP"/>
-              <a:buChar char="●"/>
-              <a:defRPr sz="2100" b="0">
-                <a:solidFill>
-                  <a:srgbClr val="303437"/>
-                </a:solidFill>
-                <a:latin typeface="Noto Sans"/>
-              </a:defRPr>
-            </a:pPr>
-            <a:r>
-              <a:rPr sz="2100" b="0" lang="ja-JP" altLang="en-US">
-                <a:solidFill>
-                  <a:srgbClr val="303437"/>
-                </a:solidFill>
-                <a:latin typeface="Noto Sans"/>
-                <a:ea typeface="Noto Sans CJK JP"/>
-                <a:cs typeface="Noto Sans"/>
-              </a:rPr>
-              <a:t>根拠を伴う中国語の検証資源を整備した研究であり、CHEFの主張は後にCLEVAの事実確認課題にも採用された。</a:t>
-            </a:r>
-          </a:p>
         </p:txBody>
       </p:sp>
       <p:sp>
@@ -40938,7 +38218,7 @@
                 <a:ea typeface="Noto Sans CJK JP"/>
                 <a:cs typeface="Noto Sans"/>
               </a:rPr>
-              <a:t>[1] Hu, Guo, Wu, Liu, Wen and Yu (2022). CHEF. NAACL-HLT, pp3362–3376.</a:t>
+              <a:t>[1] Hu et al. (2022). CHEF. NAACL-HLT.</a:t>
             </a:r>
             <a:r>
               <a:rPr sz="810" b="0" lang="ja-JP" altLang="en-US">
@@ -41400,7 +38680,7 @@
                 <a:ea typeface="Noto Sans CJK JP"/>
                 <a:cs typeface="Noto Sans CJK JP"/>
               </a:rPr>
-              <a:t>THU-BPM · commit8909b3035c14437b55154a341060b6a1866c9ba1 · 2026-10-18取得</a:t>
+              <a:t>THU-BPM · 公式データ・実装</a:t>
             </a:r>
           </a:p>
         </p:txBody>
@@ -42225,7 +39505,7 @@
                 <a:ea typeface="Noto Sans CJK JP"/>
                 <a:cs typeface="Noto Sans"/>
               </a:rPr>
-              <a:t>中国語：主張と注釈根拠の全文 ／ 日本語訳</a:t>
+              <a:t>中国語：主張と根拠の全文 ／ 日本語訳</a:t>
             </a:r>
           </a:p>
         </p:txBody>
@@ -42466,7 +39746,7 @@
                 <a:ea typeface="Noto Sans CJK JP"/>
                 <a:cs typeface="Noto Sans"/>
               </a:rPr>
-              <a:t>注釈根拠：</a:t>
+              <a:t>根拠：</a:t>
             </a:r>
           </a:p>
           <a:p>
@@ -42551,7 +39831,7 @@
                 <a:ea typeface="Noto Sans CJK JP"/>
                 <a:cs typeface="Noto Sans"/>
               </a:rPr>
-              <a:t>配布ラベル：支持 / SUP</a:t>
+              <a:t>正解：支持</a:t>
             </a:r>
           </a:p>
         </p:txBody>
@@ -42586,7 +39866,7 @@
                 <a:spcPts val="0"/>
               </a:spcBef>
               <a:spcAft>
-                <a:spcPts val="140"/>
+                <a:spcPts val="400"/>
               </a:spcAft>
               <a:buNone/>
               <a:defRPr sz="810" b="0">
@@ -42605,25 +39885,19 @@
                 <a:ea typeface="Noto Sans CJK JP"/>
                 <a:cs typeface="Noto Sans"/>
               </a:rPr>
-              <a:t>[1] THU-BPM. CHEF公式CHEF.tar.gz、train/dev/test原JSON。 train row128 / claimId977 / 根拠1文</a:t>
-            </a:r>
-          </a:p>
-          <a:p>
-            <a:pPr>
-              <a:lnSpc>
-                <a:spcPts val="940"/>
-              </a:lnSpc>
-              <a:spcAft>
-                <a:spcPts val="400"/>
-              </a:spcAft>
-              <a:buNone/>
-              <a:defRPr sz="810" b="0">
-                <a:solidFill>
-                  <a:srgbClr val="303437"/>
-                </a:solidFill>
-                <a:latin typeface="Noto Sans"/>
-              </a:defRPr>
-            </a:pPr>
+              <a:t>[1] THU-BPM. CHEF データセット。</a:t>
+            </a:r>
+            <a:r>
+              <a:rPr sz="810" b="0" lang="ja-JP" altLang="en-US">
+                <a:solidFill>
+                  <a:srgbClr val="626669"/>
+                </a:solidFill>
+                <a:latin typeface="Noto Sans"/>
+                <a:ea typeface="Noto Sans CJK JP"/>
+                <a:cs typeface="Noto Sans"/>
+              </a:rPr>
+              <a:t>  </a:t>
+            </a:r>
             <a:r>
               <a:rPr sz="810" b="0" lang="ja-JP" altLang="en-US">
                 <a:solidFill>
@@ -42700,7 +39974,7 @@
                 <a:ea typeface="Noto Sans CJK JP"/>
                 <a:cs typeface="Noto Sans"/>
               </a:rPr>
-              <a:t>発見と推測を分ける</a:t>
+              <a:t>根拠は、生命の存在を推測と位置付ける</a:t>
             </a:r>
           </a:p>
         </p:txBody>
@@ -42756,36 +40030,6 @@
               <a:t>金星に生命が存在する可能性が論じられていることと、生命が発見されたことは異なる。根拠は、生命の存在は推測にとどまると述べている。</a:t>
             </a:r>
           </a:p>
-          <a:p>
-            <a:pPr marL="457200" indent="-355600">
-              <a:lnSpc>
-                <a:spcPts val="2558"/>
-              </a:lnSpc>
-              <a:spcAft>
-                <a:spcPts val="0"/>
-              </a:spcAft>
-              <a:buSzPct val="61860"/>
-              <a:buFont typeface="Noto Sans CJK JP"/>
-              <a:buChar char="●"/>
-              <a:defRPr sz="2150" b="0">
-                <a:solidFill>
-                  <a:srgbClr val="303437"/>
-                </a:solidFill>
-                <a:latin typeface="Noto Sans"/>
-              </a:defRPr>
-            </a:pPr>
-            <a:r>
-              <a:rPr sz="2150" b="0" lang="ja-JP" altLang="en-US">
-                <a:solidFill>
-                  <a:srgbClr val="303437"/>
-                </a:solidFill>
-                <a:latin typeface="Noto Sans"/>
-                <a:ea typeface="Noto Sans CJK JP"/>
-                <a:cs typeface="Noto Sans"/>
-              </a:rPr>
-              <a:t>表示したのは主張と、人が選んだ根拠文の全文。検索で集めた記事全体を載せたものではない。</a:t>
-            </a:r>
-          </a:p>
         </p:txBody>
       </p:sp>
       <p:sp>
@@ -42885,7 +40129,7 @@
                 <a:ea typeface="Noto Sans CJK JP"/>
                 <a:cs typeface="Noto Sans"/>
               </a:rPr>
-              <a:t>[1] THU-BPM. CHEF公式CHEF.tar.gz、train/dev/test原JSON。</a:t>
+              <a:t>[1] THU-BPM. CHEF データセット。</a:t>
             </a:r>
             <a:r>
               <a:rPr sz="810" b="0" lang="ja-JP" altLang="en-US">
@@ -43076,7 +40320,7 @@
                 <a:ea typeface="Noto Sans CJK JP"/>
                 <a:cs typeface="Noto Sans"/>
               </a:rPr>
-              <a:t>中国語：主張と注釈根拠の全文</a:t>
+              <a:t>中国語：主張と根拠の全文</a:t>
             </a:r>
           </a:p>
         </p:txBody>
@@ -43297,7 +40541,7 @@
                 <a:ea typeface="Noto Sans CJK JP"/>
                 <a:cs typeface="Noto Sans"/>
               </a:rPr>
-              <a:t>配布ラベル：反証 / REF</a:t>
+              <a:t>正解：反証</a:t>
             </a:r>
           </a:p>
         </p:txBody>
@@ -43332,7 +40576,7 @@
                 <a:spcPts val="0"/>
               </a:spcBef>
               <a:spcAft>
-                <a:spcPts val="140"/>
+                <a:spcPts val="400"/>
               </a:spcAft>
               <a:buNone/>
               <a:defRPr sz="810" b="0">
@@ -43351,25 +40595,19 @@
                 <a:ea typeface="Noto Sans CJK JP"/>
                 <a:cs typeface="Noto Sans"/>
               </a:rPr>
-              <a:t>[1] THU-BPM. CHEF公式CHEF.tar.gz、train/dev/test原JSON。 train row3728 / claimId1281 / 根拠2文</a:t>
-            </a:r>
-          </a:p>
-          <a:p>
-            <a:pPr>
-              <a:lnSpc>
-                <a:spcPts val="940"/>
-              </a:lnSpc>
-              <a:spcAft>
-                <a:spcPts val="400"/>
-              </a:spcAft>
-              <a:buNone/>
-              <a:defRPr sz="810" b="0">
-                <a:solidFill>
-                  <a:srgbClr val="303437"/>
-                </a:solidFill>
-                <a:latin typeface="Noto Sans"/>
-              </a:defRPr>
-            </a:pPr>
+              <a:t>[1] THU-BPM. CHEF データセット。</a:t>
+            </a:r>
+            <a:r>
+              <a:rPr sz="810" b="0" lang="ja-JP" altLang="en-US">
+                <a:solidFill>
+                  <a:srgbClr val="626669"/>
+                </a:solidFill>
+                <a:latin typeface="Noto Sans"/>
+                <a:ea typeface="Noto Sans CJK JP"/>
+                <a:cs typeface="Noto Sans"/>
+              </a:rPr>
+              <a:t>  </a:t>
+            </a:r>
             <a:r>
               <a:rPr sz="810" b="0" lang="ja-JP" altLang="en-US">
                 <a:solidFill>

--- a/slides/datasets-in-10-minutes-chef.pptx
+++ b/slides/datasets-in-10-minutes-chef.pptx
@@ -7411,11 +7411,11 @@
         <p:spPr>
           <a:xfrm>
             <a:off x="548640" y="2647277"/>
-            <a:ext cx="8046720" cy="989965"/>
+            <a:ext cx="8046720" cy="1091565"/>
           </a:xfrm>
         </p:spPr>
         <p:txBody>
-          <a:bodyPr lIns="0" rIns="0" tIns="0" bIns="0">
+          <a:bodyPr lIns="0" rIns="0" tIns="0" bIns="101600">
             <a:noAutofit/>
           </a:bodyPr>
           <a:lstStyle/>
@@ -17996,11 +17996,11 @@
         <p:spPr>
           <a:xfrm>
             <a:off x="548640" y="2484835"/>
-            <a:ext cx="8046720" cy="585216"/>
+            <a:ext cx="8046720" cy="686816"/>
           </a:xfrm>
         </p:spPr>
         <p:txBody>
-          <a:bodyPr wrap="square" lIns="0" rIns="0" tIns="0" bIns="0" anchor="ctr">
+          <a:bodyPr wrap="square" lIns="0" rIns="0" tIns="0" bIns="101600" anchor="ctr">
             <a:noAutofit/>
           </a:bodyPr>
           <a:lstStyle/>
